--- a/demo_review.pptx
+++ b/demo_review.pptx
@@ -13,6 +13,7 @@
     <p:sldId id="261" r:id="rId12"/>
     <p:sldId id="262" r:id="rId13"/>
     <p:sldId id="263" r:id="rId14"/>
+    <p:sldId id="264" r:id="rId15"/>
   </p:sldIdLst>
   <p:sldSz cx="12191695" cy="6858000" type="screen4x3"/>
   <p:notesSz cx="6858000" cy="9144000"/>
@@ -3195,7 +3196,7 @@
               </a:defRPr>
             </a:pPr>
             <a:r>
-              <a:t>Stand KW15 · 2022-04-15 · Vergleich zu KW14</a:t>
+              <a:t>Stand 2026-10-02 · 2026-10-02 · Vergleich zu 2022-04-08</a:t>
             </a:r>
           </a:p>
         </p:txBody>
@@ -3230,7 +3231,7 @@
               </a:defRPr>
             </a:pPr>
             <a:r>
-              <a:t>J.A. Project Engineering · PJM Project Review · Stand 2022-04-15</a:t>
+              <a:t>J.A. Project Engineering · PJM Project Review · Stand 2026-10-02</a:t>
             </a:r>
           </a:p>
         </p:txBody>
@@ -3283,7 +3284,7 @@
               </a:defRPr>
             </a:pPr>
             <a:r>
-              <a:t>Übersicht – KW15</a:t>
+              <a:t>Übersicht – 2026-10-02</a:t>
             </a:r>
           </a:p>
         </p:txBody>
@@ -3341,7 +3342,7 @@
         </p:nvGraphicFramePr>
         <p:xfrm>
           <a:off x="548640" y="1188720"/>
-          <a:ext cx="5486400" cy="3291840"/>
+          <a:ext cx="5486400" cy="4389120"/>
         </p:xfrm>
         <a:graphic>
           <a:graphicData uri="http://schemas.openxmlformats.org/drawingml/2006/table">
@@ -3395,7 +3396,7 @@
                         <a:defRPr sz="1400" b="0"/>
                       </a:pPr>
                       <a:r>
-                        <a:t>Stichtag</a:t>
+                        <a:t>Stichtag (Auswertungstag)</a:t>
                       </a:r>
                     </a:p>
                   </a:txBody>
@@ -3410,7 +3411,7 @@
                         <a:defRPr sz="1400" b="0"/>
                       </a:pPr>
                       <a:r>
-                        <a:t>2022-04-15</a:t>
+                        <a:t>2026-10-02</a:t>
                       </a:r>
                     </a:p>
                   </a:txBody>
@@ -3459,7 +3460,7 @@
                         <a:defRPr sz="1400" b="0"/>
                       </a:pPr>
                       <a:r>
-                        <a:t>Geplant geschlossen</a:t>
+                        <a:t>davon Aufgaben (&gt;0 Tage)</a:t>
                       </a:r>
                     </a:p>
                   </a:txBody>
@@ -3474,7 +3475,7 @@
                         <a:defRPr sz="1400" b="0"/>
                       </a:pPr>
                       <a:r>
-                        <a:t>63</a:t>
+                        <a:t>95</a:t>
                       </a:r>
                     </a:p>
                   </a:txBody>
@@ -3491,7 +3492,7 @@
                         <a:defRPr sz="1400" b="0"/>
                       </a:pPr>
                       <a:r>
-                        <a:t>Tatsächlich geschlossen</a:t>
+                        <a:t>davon Meilensteine (0 Tage)</a:t>
                       </a:r>
                     </a:p>
                   </a:txBody>
@@ -3506,7 +3507,7 @@
                         <a:defRPr sz="1400" b="0"/>
                       </a:pPr>
                       <a:r>
-                        <a:t>48</a:t>
+                        <a:t>0</a:t>
                       </a:r>
                     </a:p>
                   </a:txBody>
@@ -3523,7 +3524,7 @@
                         <a:defRPr sz="1400" b="0"/>
                       </a:pPr>
                       <a:r>
-                        <a:t>Erfüllungsgrad</a:t>
+                        <a:t>Geplant geschlossen</a:t>
                       </a:r>
                     </a:p>
                   </a:txBody>
@@ -3538,7 +3539,7 @@
                         <a:defRPr sz="1400" b="0"/>
                       </a:pPr>
                       <a:r>
-                        <a:t>76.2 %</a:t>
+                        <a:t>93</a:t>
                       </a:r>
                     </a:p>
                   </a:txBody>
@@ -3555,7 +3556,7 @@
                         <a:defRPr sz="1400" b="0"/>
                       </a:pPr>
                       <a:r>
-                        <a:t>Überfällig (offen)</a:t>
+                        <a:t>Tatsächlich geschlossen</a:t>
                       </a:r>
                     </a:p>
                   </a:txBody>
@@ -3570,7 +3571,7 @@
                         <a:defRPr sz="1400" b="0"/>
                       </a:pPr>
                       <a:r>
-                        <a:t>8</a:t>
+                        <a:t>48</a:t>
                       </a:r>
                     </a:p>
                   </a:txBody>
@@ -3587,7 +3588,7 @@
                         <a:defRPr sz="1400" b="0"/>
                       </a:pPr>
                       <a:r>
-                        <a:t>Verspätet geschlossen</a:t>
+                        <a:t>Erfüllungsgrad</a:t>
                       </a:r>
                     </a:p>
                   </a:txBody>
@@ -3602,7 +3603,7 @@
                         <a:defRPr sz="1400" b="0"/>
                       </a:pPr>
                       <a:r>
-                        <a:t>35</a:t>
+                        <a:t>51.6 %</a:t>
                       </a:r>
                     </a:p>
                   </a:txBody>
@@ -3619,6 +3620,70 @@
                         <a:defRPr sz="1400" b="0"/>
                       </a:pPr>
                       <a:r>
+                        <a:t>Überfällig (offen)</a:t>
+                      </a:r>
+                    </a:p>
+                  </a:txBody>
+                  <a:tcPr/>
+                </a:tc>
+                <a:tc>
+                  <a:txBody>
+                    <a:bodyPr/>
+                    <a:lstStyle/>
+                    <a:p>
+                      <a:pPr>
+                        <a:defRPr sz="1400" b="0"/>
+                      </a:pPr>
+                      <a:r>
+                        <a:t>45</a:t>
+                      </a:r>
+                    </a:p>
+                  </a:txBody>
+                  <a:tcPr/>
+                </a:tc>
+              </a:tr>
+              <a:tr h="365760">
+                <a:tc>
+                  <a:txBody>
+                    <a:bodyPr/>
+                    <a:lstStyle/>
+                    <a:p>
+                      <a:pPr>
+                        <a:defRPr sz="1400" b="0"/>
+                      </a:pPr>
+                      <a:r>
+                        <a:t>Verspätet geschlossen</a:t>
+                      </a:r>
+                    </a:p>
+                  </a:txBody>
+                  <a:tcPr/>
+                </a:tc>
+                <a:tc>
+                  <a:txBody>
+                    <a:bodyPr/>
+                    <a:lstStyle/>
+                    <a:p>
+                      <a:pPr>
+                        <a:defRPr sz="1400" b="0"/>
+                      </a:pPr>
+                      <a:r>
+                        <a:t>35</a:t>
+                      </a:r>
+                    </a:p>
+                  </a:txBody>
+                  <a:tcPr/>
+                </a:tc>
+              </a:tr>
+              <a:tr h="365760">
+                <a:tc>
+                  <a:txBody>
+                    <a:bodyPr/>
+                    <a:lstStyle/>
+                    <a:p>
+                      <a:pPr>
+                        <a:defRPr sz="1400" b="0"/>
+                      </a:pPr>
+                      <a:r>
                         <a:t>Hold</a:t>
                       </a:r>
                     </a:p>
@@ -3635,6 +3700,38 @@
                       </a:pPr>
                       <a:r>
                         <a:t>2</a:t>
+                      </a:r>
+                    </a:p>
+                  </a:txBody>
+                  <a:tcPr/>
+                </a:tc>
+              </a:tr>
+              <a:tr h="365760">
+                <a:tc>
+                  <a:txBody>
+                    <a:bodyPr/>
+                    <a:lstStyle/>
+                    <a:p>
+                      <a:pPr>
+                        <a:defRPr sz="1400" b="0"/>
+                      </a:pPr>
+                      <a:r>
+                        <a:t>Cancelled</a:t>
+                      </a:r>
+                    </a:p>
+                  </a:txBody>
+                  <a:tcPr/>
+                </a:tc>
+                <a:tc>
+                  <a:txBody>
+                    <a:bodyPr/>
+                    <a:lstStyle/>
+                    <a:p>
+                      <a:pPr>
+                        <a:defRPr sz="1400" b="0"/>
+                      </a:pPr>
+                      <a:r>
+                        <a:t>0</a:t>
                       </a:r>
                     </a:p>
                   </a:txBody>
@@ -3675,7 +3772,7 @@
               </a:defRPr>
             </a:pPr>
             <a:r>
-              <a:t>J.A. Project Engineering · PJM Project Review · Stand 2022-04-15</a:t>
+              <a:t>J.A. Project Engineering · PJM Project Review · Stand 2026-10-02</a:t>
             </a:r>
           </a:p>
         </p:txBody>
@@ -3830,7 +3927,7 @@
               </a:defRPr>
             </a:pPr>
             <a:r>
-              <a:t>J.A. Project Engineering · PJM Project Review · Stand 2022-04-15</a:t>
+              <a:t>J.A. Project Engineering · PJM Project Review · Stand 2026-10-02</a:t>
             </a:r>
           </a:p>
         </p:txBody>
@@ -3883,7 +3980,7 @@
               </a:defRPr>
             </a:pPr>
             <a:r>
-              <a:t>Aufgaben je Fachabteilung</a:t>
+              <a:t>Verschiebung des erwarteten Projektendes</a:t>
             </a:r>
           </a:p>
         </p:txBody>
@@ -3985,7 +4082,7 @@
               </a:defRPr>
             </a:pPr>
             <a:r>
-              <a:t>J.A. Project Engineering · PJM Project Review · Stand 2022-04-15</a:t>
+              <a:t>J.A. Project Engineering · PJM Project Review · Stand 2026-10-02</a:t>
             </a:r>
           </a:p>
         </p:txBody>
@@ -4038,7 +4135,7 @@
               </a:defRPr>
             </a:pPr>
             <a:r>
-              <a:t>Überfällige Aufgaben je Fachabteilung</a:t>
+              <a:t>Aufgaben je Fachabteilung</a:t>
             </a:r>
           </a:p>
         </p:txBody>
@@ -4140,7 +4237,7 @@
               </a:defRPr>
             </a:pPr>
             <a:r>
-              <a:t>J.A. Project Engineering · PJM Project Review · Stand 2022-04-15</a:t>
+              <a:t>J.A. Project Engineering · PJM Project Review · Stand 2026-10-02</a:t>
             </a:r>
           </a:p>
         </p:txBody>
@@ -4193,7 +4290,7 @@
               </a:defRPr>
             </a:pPr>
             <a:r>
-              <a:t>Top-5 Overdues – KW14 vs. KW15</a:t>
+              <a:t>Überfällige Aufgaben je Fachabteilung</a:t>
             </a:r>
           </a:p>
         </p:txBody>
@@ -4241,426 +4338,30 @@
           </a:p>
         </p:txBody>
       </p:sp>
-      <p:graphicFrame>
-        <p:nvGraphicFramePr>
-          <p:cNvPr id="4" name="Table 3"/>
-          <p:cNvGraphicFramePr>
-            <a:graphicFrameLocks noGrp="1"/>
-          </p:cNvGraphicFramePr>
+      <p:pic>
+        <p:nvPicPr>
+          <p:cNvPr id="4" name="Picture 3" descr="image.png"/>
+          <p:cNvPicPr>
+            <a:picLocks noChangeAspect="1"/>
+          </p:cNvPicPr>
           <p:nvPr/>
-        </p:nvGraphicFramePr>
-        <p:xfrm>
-          <a:off x="548640" y="1188720"/>
-          <a:ext cx="7315200" cy="2194560"/>
-        </p:xfrm>
-        <a:graphic>
-          <a:graphicData uri="http://schemas.openxmlformats.org/drawingml/2006/table">
-            <a:tbl>
-              <a:tblPr firstRow="1" bandRow="1">
-                <a:tableStyleId>{5C22544A-7EE6-4342-B048-85BDC9FD1C3A}</a:tableStyleId>
-              </a:tblPr>
-              <a:tblGrid>
-                <a:gridCol w="2926080"/>
-                <a:gridCol w="1463040"/>
-                <a:gridCol w="1463040"/>
-                <a:gridCol w="1463040"/>
-              </a:tblGrid>
-              <a:tr h="365760">
-                <a:tc>
-                  <a:txBody>
-                    <a:bodyPr/>
-                    <a:lstStyle/>
-                    <a:p>
-                      <a:pPr>
-                        <a:defRPr sz="1400" b="1"/>
-                      </a:pPr>
-                      <a:r>
-                        <a:t>Fachabteilung</a:t>
-                      </a:r>
-                    </a:p>
-                  </a:txBody>
-                  <a:tcPr/>
-                </a:tc>
-                <a:tc>
-                  <a:txBody>
-                    <a:bodyPr/>
-                    <a:lstStyle/>
-                    <a:p>
-                      <a:pPr>
-                        <a:defRPr sz="1400" b="1"/>
-                      </a:pPr>
-                      <a:r>
-                        <a:t>KW14</a:t>
-                      </a:r>
-                    </a:p>
-                  </a:txBody>
-                  <a:tcPr/>
-                </a:tc>
-                <a:tc>
-                  <a:txBody>
-                    <a:bodyPr/>
-                    <a:lstStyle/>
-                    <a:p>
-                      <a:pPr>
-                        <a:defRPr sz="1400" b="1"/>
-                      </a:pPr>
-                      <a:r>
-                        <a:t>KW15</a:t>
-                      </a:r>
-                    </a:p>
-                  </a:txBody>
-                  <a:tcPr/>
-                </a:tc>
-                <a:tc>
-                  <a:txBody>
-                    <a:bodyPr/>
-                    <a:lstStyle/>
-                    <a:p>
-                      <a:pPr>
-                        <a:defRPr sz="1400" b="1"/>
-                      </a:pPr>
-                      <a:r>
-                        <a:t>Trend</a:t>
-                      </a:r>
-                    </a:p>
-                  </a:txBody>
-                  <a:tcPr/>
-                </a:tc>
-              </a:tr>
-              <a:tr h="365760">
-                <a:tc>
-                  <a:txBody>
-                    <a:bodyPr/>
-                    <a:lstStyle/>
-                    <a:p>
-                      <a:pPr>
-                        <a:defRPr sz="1400" b="0"/>
-                      </a:pPr>
-                      <a:r>
-                        <a:t>AE-COS</a:t>
-                      </a:r>
-                    </a:p>
-                  </a:txBody>
-                  <a:tcPr/>
-                </a:tc>
-                <a:tc>
-                  <a:txBody>
-                    <a:bodyPr/>
-                    <a:lstStyle/>
-                    <a:p>
-                      <a:pPr>
-                        <a:defRPr sz="1400" b="0"/>
-                      </a:pPr>
-                      <a:r>
-                        <a:t>1</a:t>
-                      </a:r>
-                    </a:p>
-                  </a:txBody>
-                  <a:tcPr/>
-                </a:tc>
-                <a:tc>
-                  <a:txBody>
-                    <a:bodyPr/>
-                    <a:lstStyle/>
-                    <a:p>
-                      <a:pPr>
-                        <a:defRPr sz="1400" b="0"/>
-                      </a:pPr>
-                      <a:r>
-                        <a:t>2</a:t>
-                      </a:r>
-                    </a:p>
-                  </a:txBody>
-                  <a:tcPr/>
-                </a:tc>
-                <a:tc>
-                  <a:txBody>
-                    <a:bodyPr/>
-                    <a:lstStyle/>
-                    <a:p>
-                      <a:pPr>
-                        <a:defRPr sz="1400" b="0">
-                          <a:solidFill>
-                            <a:srgbClr val="D62728"/>
-                          </a:solidFill>
-                        </a:defRPr>
-                      </a:pPr>
-                      <a:r>
-                        <a:t>▲ +1</a:t>
-                      </a:r>
-                    </a:p>
-                  </a:txBody>
-                  <a:tcPr/>
-                </a:tc>
-              </a:tr>
-              <a:tr h="365760">
-                <a:tc>
-                  <a:txBody>
-                    <a:bodyPr/>
-                    <a:lstStyle/>
-                    <a:p>
-                      <a:pPr>
-                        <a:defRPr sz="1400" b="0"/>
-                      </a:pPr>
-                      <a:r>
-                        <a:t>TEST</a:t>
-                      </a:r>
-                    </a:p>
-                  </a:txBody>
-                  <a:tcPr/>
-                </a:tc>
-                <a:tc>
-                  <a:txBody>
-                    <a:bodyPr/>
-                    <a:lstStyle/>
-                    <a:p>
-                      <a:pPr>
-                        <a:defRPr sz="1400" b="0"/>
-                      </a:pPr>
-                      <a:r>
-                        <a:t>0</a:t>
-                      </a:r>
-                    </a:p>
-                  </a:txBody>
-                  <a:tcPr/>
-                </a:tc>
-                <a:tc>
-                  <a:txBody>
-                    <a:bodyPr/>
-                    <a:lstStyle/>
-                    <a:p>
-                      <a:pPr>
-                        <a:defRPr sz="1400" b="0"/>
-                      </a:pPr>
-                      <a:r>
-                        <a:t>2</a:t>
-                      </a:r>
-                    </a:p>
-                  </a:txBody>
-                  <a:tcPr/>
-                </a:tc>
-                <a:tc>
-                  <a:txBody>
-                    <a:bodyPr/>
-                    <a:lstStyle/>
-                    <a:p>
-                      <a:pPr>
-                        <a:defRPr sz="1400" b="0">
-                          <a:solidFill>
-                            <a:srgbClr val="D62728"/>
-                          </a:solidFill>
-                        </a:defRPr>
-                      </a:pPr>
-                      <a:r>
-                        <a:t>▲ +2</a:t>
-                      </a:r>
-                    </a:p>
-                  </a:txBody>
-                  <a:tcPr/>
-                </a:tc>
-              </a:tr>
-              <a:tr h="365760">
-                <a:tc>
-                  <a:txBody>
-                    <a:bodyPr/>
-                    <a:lstStyle/>
-                    <a:p>
-                      <a:pPr>
-                        <a:defRPr sz="1400" b="0"/>
-                      </a:pPr>
-                      <a:r>
-                        <a:t>AA</a:t>
-                      </a:r>
-                    </a:p>
-                  </a:txBody>
-                  <a:tcPr/>
-                </a:tc>
-                <a:tc>
-                  <a:txBody>
-                    <a:bodyPr/>
-                    <a:lstStyle/>
-                    <a:p>
-                      <a:pPr>
-                        <a:defRPr sz="1400" b="0"/>
-                      </a:pPr>
-                      <a:r>
-                        <a:t>0</a:t>
-                      </a:r>
-                    </a:p>
-                  </a:txBody>
-                  <a:tcPr/>
-                </a:tc>
-                <a:tc>
-                  <a:txBody>
-                    <a:bodyPr/>
-                    <a:lstStyle/>
-                    <a:p>
-                      <a:pPr>
-                        <a:defRPr sz="1400" b="0"/>
-                      </a:pPr>
-                      <a:r>
-                        <a:t>1</a:t>
-                      </a:r>
-                    </a:p>
-                  </a:txBody>
-                  <a:tcPr/>
-                </a:tc>
-                <a:tc>
-                  <a:txBody>
-                    <a:bodyPr/>
-                    <a:lstStyle/>
-                    <a:p>
-                      <a:pPr>
-                        <a:defRPr sz="1400" b="0">
-                          <a:solidFill>
-                            <a:srgbClr val="D62728"/>
-                          </a:solidFill>
-                        </a:defRPr>
-                      </a:pPr>
-                      <a:r>
-                        <a:t>▲ +1</a:t>
-                      </a:r>
-                    </a:p>
-                  </a:txBody>
-                  <a:tcPr/>
-                </a:tc>
-              </a:tr>
-              <a:tr h="365760">
-                <a:tc>
-                  <a:txBody>
-                    <a:bodyPr/>
-                    <a:lstStyle/>
-                    <a:p>
-                      <a:pPr>
-                        <a:defRPr sz="1400" b="0"/>
-                      </a:pPr>
-                      <a:r>
-                        <a:t>ENG</a:t>
-                      </a:r>
-                    </a:p>
-                  </a:txBody>
-                  <a:tcPr/>
-                </a:tc>
-                <a:tc>
-                  <a:txBody>
-                    <a:bodyPr/>
-                    <a:lstStyle/>
-                    <a:p>
-                      <a:pPr>
-                        <a:defRPr sz="1400" b="0"/>
-                      </a:pPr>
-                      <a:r>
-                        <a:t>0</a:t>
-                      </a:r>
-                    </a:p>
-                  </a:txBody>
-                  <a:tcPr/>
-                </a:tc>
-                <a:tc>
-                  <a:txBody>
-                    <a:bodyPr/>
-                    <a:lstStyle/>
-                    <a:p>
-                      <a:pPr>
-                        <a:defRPr sz="1400" b="0"/>
-                      </a:pPr>
-                      <a:r>
-                        <a:t>1</a:t>
-                      </a:r>
-                    </a:p>
-                  </a:txBody>
-                  <a:tcPr/>
-                </a:tc>
-                <a:tc>
-                  <a:txBody>
-                    <a:bodyPr/>
-                    <a:lstStyle/>
-                    <a:p>
-                      <a:pPr>
-                        <a:defRPr sz="1400" b="0">
-                          <a:solidFill>
-                            <a:srgbClr val="D62728"/>
-                          </a:solidFill>
-                        </a:defRPr>
-                      </a:pPr>
-                      <a:r>
-                        <a:t>▲ +1</a:t>
-                      </a:r>
-                    </a:p>
-                  </a:txBody>
-                  <a:tcPr/>
-                </a:tc>
-              </a:tr>
-              <a:tr h="365760">
-                <a:tc>
-                  <a:txBody>
-                    <a:bodyPr/>
-                    <a:lstStyle/>
-                    <a:p>
-                      <a:pPr>
-                        <a:defRPr sz="1400" b="0"/>
-                      </a:pPr>
-                      <a:r>
-                        <a:t>ENG-EE</a:t>
-                      </a:r>
-                    </a:p>
-                  </a:txBody>
-                  <a:tcPr/>
-                </a:tc>
-                <a:tc>
-                  <a:txBody>
-                    <a:bodyPr/>
-                    <a:lstStyle/>
-                    <a:p>
-                      <a:pPr>
-                        <a:defRPr sz="1400" b="0"/>
-                      </a:pPr>
-                      <a:r>
-                        <a:t>0</a:t>
-                      </a:r>
-                    </a:p>
-                  </a:txBody>
-                  <a:tcPr/>
-                </a:tc>
-                <a:tc>
-                  <a:txBody>
-                    <a:bodyPr/>
-                    <a:lstStyle/>
-                    <a:p>
-                      <a:pPr>
-                        <a:defRPr sz="1400" b="0"/>
-                      </a:pPr>
-                      <a:r>
-                        <a:t>1</a:t>
-                      </a:r>
-                    </a:p>
-                  </a:txBody>
-                  <a:tcPr/>
-                </a:tc>
-                <a:tc>
-                  <a:txBody>
-                    <a:bodyPr/>
-                    <a:lstStyle/>
-                    <a:p>
-                      <a:pPr>
-                        <a:defRPr sz="1400" b="0">
-                          <a:solidFill>
-                            <a:srgbClr val="D62728"/>
-                          </a:solidFill>
-                        </a:defRPr>
-                      </a:pPr>
-                      <a:r>
-                        <a:t>▲ +1</a:t>
-                      </a:r>
-                    </a:p>
-                  </a:txBody>
-                  <a:tcPr/>
-                </a:tc>
-              </a:tr>
-            </a:tbl>
-          </a:graphicData>
-        </a:graphic>
-      </p:graphicFrame>
+        </p:nvPicPr>
+        <p:blipFill>
+          <a:blip r:embed="rId2"/>
+          <a:stretch>
+            <a:fillRect/>
+          </a:stretch>
+        </p:blipFill>
+        <p:spPr>
+          <a:xfrm>
+            <a:off x="365760" y="1097280"/>
+            <a:ext cx="11430000" cy="5120640"/>
+          </a:xfrm>
+          <a:prstGeom prst="rect">
+            <a:avLst/>
+          </a:prstGeom>
+        </p:spPr>
+      </p:pic>
       <p:sp>
         <p:nvSpPr>
           <p:cNvPr id="5" name="TextBox 4"/>
@@ -4691,7 +4392,7 @@
               </a:defRPr>
             </a:pPr>
             <a:r>
-              <a:t>J.A. Project Engineering · PJM Project Review · Stand 2022-04-15</a:t>
+              <a:t>J.A. Project Engineering · PJM Project Review · Stand 2026-10-02</a:t>
             </a:r>
           </a:p>
         </p:txBody>
@@ -4744,7 +4445,7 @@
               </a:defRPr>
             </a:pPr>
             <a:r>
-              <a:t>Überfällige Aufgaben – KW15 (8)</a:t>
+              <a:t>Top-5 Overdues mit Trendanalyse – 2022-04-08 vs. 2026-10-02</a:t>
             </a:r>
           </a:p>
         </p:txBody>
@@ -4801,8 +4502,8 @@
           <p:nvPr/>
         </p:nvGraphicFramePr>
         <p:xfrm>
-          <a:off x="457200" y="1097280"/>
-          <a:ext cx="11247120" cy="3291840"/>
+          <a:off x="548640" y="1188720"/>
+          <a:ext cx="8229600" cy="2194560"/>
         </p:xfrm>
         <a:graphic>
           <a:graphicData uri="http://schemas.openxmlformats.org/drawingml/2006/table">
@@ -4811,11 +4512,11 @@
                 <a:tableStyleId>{5C22544A-7EE6-4342-B048-85BDC9FD1C3A}</a:tableStyleId>
               </a:tblPr>
               <a:tblGrid>
-                <a:gridCol w="1463040"/>
-                <a:gridCol w="5943600"/>
+                <a:gridCol w="2743200"/>
+                <a:gridCol w="1280160"/>
+                <a:gridCol w="1280160"/>
+                <a:gridCol w="1280160"/>
                 <a:gridCol w="1645920"/>
-                <a:gridCol w="1097280"/>
-                <a:gridCol w="1097280"/>
               </a:tblGrid>
               <a:tr h="365760">
                 <a:tc>
@@ -4824,70 +4525,70 @@
                     <a:lstStyle/>
                     <a:p>
                       <a:pPr>
-                        <a:defRPr sz="1000" b="1"/>
-                      </a:pPr>
-                      <a:r>
-                        <a:t>Abteilung</a:t>
-                      </a:r>
-                    </a:p>
-                  </a:txBody>
-                  <a:tcPr/>
-                </a:tc>
-                <a:tc>
-                  <a:txBody>
-                    <a:bodyPr/>
-                    <a:lstStyle/>
-                    <a:p>
-                      <a:pPr>
-                        <a:defRPr sz="1000" b="1"/>
-                      </a:pPr>
-                      <a:r>
-                        <a:t>Aufgabe</a:t>
-                      </a:r>
-                    </a:p>
-                  </a:txBody>
-                  <a:tcPr/>
-                </a:tc>
-                <a:tc>
-                  <a:txBody>
-                    <a:bodyPr/>
-                    <a:lstStyle/>
-                    <a:p>
-                      <a:pPr>
-                        <a:defRPr sz="1000" b="1"/>
-                      </a:pPr>
-                      <a:r>
-                        <a:t>Geplantes Ende</a:t>
-                      </a:r>
-                    </a:p>
-                  </a:txBody>
-                  <a:tcPr/>
-                </a:tc>
-                <a:tc>
-                  <a:txBody>
-                    <a:bodyPr/>
-                    <a:lstStyle/>
-                    <a:p>
-                      <a:pPr>
-                        <a:defRPr sz="1000" b="1"/>
-                      </a:pPr>
-                      <a:r>
-                        <a:t>Verzug</a:t>
-                      </a:r>
-                    </a:p>
-                  </a:txBody>
-                  <a:tcPr/>
-                </a:tc>
-                <a:tc>
-                  <a:txBody>
-                    <a:bodyPr/>
-                    <a:lstStyle/>
-                    <a:p>
-                      <a:pPr>
-                        <a:defRPr sz="1000" b="1"/>
-                      </a:pPr>
-                      <a:r>
-                        <a:t>Fortschritt</a:t>
+                        <a:defRPr sz="1400" b="1"/>
+                      </a:pPr>
+                      <a:r>
+                        <a:t>Fachabteilung</a:t>
+                      </a:r>
+                    </a:p>
+                  </a:txBody>
+                  <a:tcPr/>
+                </a:tc>
+                <a:tc>
+                  <a:txBody>
+                    <a:bodyPr/>
+                    <a:lstStyle/>
+                    <a:p>
+                      <a:pPr>
+                        <a:defRPr sz="1400" b="1"/>
+                      </a:pPr>
+                      <a:r>
+                        <a:t>2022-04-08</a:t>
+                      </a:r>
+                    </a:p>
+                  </a:txBody>
+                  <a:tcPr/>
+                </a:tc>
+                <a:tc>
+                  <a:txBody>
+                    <a:bodyPr/>
+                    <a:lstStyle/>
+                    <a:p>
+                      <a:pPr>
+                        <a:defRPr sz="1400" b="1"/>
+                      </a:pPr>
+                      <a:r>
+                        <a:t>2026-10-02</a:t>
+                      </a:r>
+                    </a:p>
+                  </a:txBody>
+                  <a:tcPr/>
+                </a:tc>
+                <a:tc>
+                  <a:txBody>
+                    <a:bodyPr/>
+                    <a:lstStyle/>
+                    <a:p>
+                      <a:pPr>
+                        <a:defRPr sz="1400" b="1"/>
+                      </a:pPr>
+                      <a:r>
+                        <a:t>Trend</a:t>
+                      </a:r>
+                    </a:p>
+                  </a:txBody>
+                  <a:tcPr/>
+                </a:tc>
+                <a:tc>
+                  <a:txBody>
+                    <a:bodyPr/>
+                    <a:lstStyle/>
+                    <a:p>
+                      <a:pPr>
+                        <a:defRPr sz="1400" b="1"/>
+                      </a:pPr>
+                      <a:r>
+                        <a:t>Verlauf</a:t>
                       </a:r>
                     </a:p>
                   </a:txBody>
@@ -4901,70 +4602,70 @@
                     <a:lstStyle/>
                     <a:p>
                       <a:pPr>
-                        <a:defRPr sz="1000" b="0"/>
-                      </a:pPr>
-                      <a:r>
-                        <a:t>AE-COS</a:t>
-                      </a:r>
-                    </a:p>
-                  </a:txBody>
-                  <a:tcPr/>
-                </a:tc>
-                <a:tc>
-                  <a:txBody>
-                    <a:bodyPr/>
-                    <a:lstStyle/>
-                    <a:p>
-                      <a:pPr>
-                        <a:defRPr sz="1000" b="0"/>
-                      </a:pPr>
-                      <a:r>
-                        <a:t>AE-COS Aufgabe 003</a:t>
-                      </a:r>
-                    </a:p>
-                  </a:txBody>
-                  <a:tcPr/>
-                </a:tc>
-                <a:tc>
-                  <a:txBody>
-                    <a:bodyPr/>
-                    <a:lstStyle/>
-                    <a:p>
-                      <a:pPr>
-                        <a:defRPr sz="1000" b="0"/>
-                      </a:pPr>
-                      <a:r>
-                        <a:t>2022-03-30</a:t>
-                      </a:r>
-                    </a:p>
-                  </a:txBody>
-                  <a:tcPr/>
-                </a:tc>
-                <a:tc>
-                  <a:txBody>
-                    <a:bodyPr/>
-                    <a:lstStyle/>
-                    <a:p>
-                      <a:pPr>
-                        <a:defRPr sz="1000" b="0"/>
-                      </a:pPr>
-                      <a:r>
-                        <a:t>16 d</a:t>
-                      </a:r>
-                    </a:p>
-                  </a:txBody>
-                  <a:tcPr/>
-                </a:tc>
-                <a:tc>
-                  <a:txBody>
-                    <a:bodyPr/>
-                    <a:lstStyle/>
-                    <a:p>
-                      <a:pPr>
-                        <a:defRPr sz="1000" b="0"/>
-                      </a:pPr>
-                      <a:r>
-                        <a:t>95 %</a:t>
+                        <a:defRPr sz="1400" b="0"/>
+                      </a:pPr>
+                      <a:r>
+                        <a:t>ENG-ME</a:t>
+                      </a:r>
+                    </a:p>
+                  </a:txBody>
+                  <a:tcPr/>
+                </a:tc>
+                <a:tc>
+                  <a:txBody>
+                    <a:bodyPr/>
+                    <a:lstStyle/>
+                    <a:p>
+                      <a:pPr>
+                        <a:defRPr sz="1400" b="0"/>
+                      </a:pPr>
+                      <a:r>
+                        <a:t>0</a:t>
+                      </a:r>
+                    </a:p>
+                  </a:txBody>
+                  <a:tcPr/>
+                </a:tc>
+                <a:tc>
+                  <a:txBody>
+                    <a:bodyPr/>
+                    <a:lstStyle/>
+                    <a:p>
+                      <a:pPr>
+                        <a:defRPr sz="1400" b="0"/>
+                      </a:pPr>
+                      <a:r>
+                        <a:t>6</a:t>
+                      </a:r>
+                    </a:p>
+                  </a:txBody>
+                  <a:tcPr/>
+                </a:tc>
+                <a:tc>
+                  <a:txBody>
+                    <a:bodyPr/>
+                    <a:lstStyle/>
+                    <a:p>
+                      <a:pPr>
+                        <a:defRPr sz="1400" b="0"/>
+                      </a:pPr>
+                      <a:r>
+                        <a:t>▲ +6</a:t>
+                      </a:r>
+                    </a:p>
+                  </a:txBody>
+                  <a:tcPr/>
+                </a:tc>
+                <a:tc>
+                  <a:txBody>
+                    <a:bodyPr/>
+                    <a:lstStyle/>
+                    <a:p>
+                      <a:pPr>
+                        <a:defRPr sz="1400" b="0"/>
+                      </a:pPr>
+                      <a:r>
+                        <a:t>▁▁▁▁▁█</a:t>
                       </a:r>
                     </a:p>
                   </a:txBody>
@@ -4978,70 +4679,70 @@
                     <a:lstStyle/>
                     <a:p>
                       <a:pPr>
-                        <a:defRPr sz="1000" b="0"/>
-                      </a:pPr>
-                      <a:r>
-                        <a:t>AA</a:t>
-                      </a:r>
-                    </a:p>
-                  </a:txBody>
-                  <a:tcPr/>
-                </a:tc>
-                <a:tc>
-                  <a:txBody>
-                    <a:bodyPr/>
-                    <a:lstStyle/>
-                    <a:p>
-                      <a:pPr>
-                        <a:defRPr sz="1000" b="0"/>
-                      </a:pPr>
-                      <a:r>
-                        <a:t>AA Aufgabe 075</a:t>
-                      </a:r>
-                    </a:p>
-                  </a:txBody>
-                  <a:tcPr/>
-                </a:tc>
-                <a:tc>
-                  <a:txBody>
-                    <a:bodyPr/>
-                    <a:lstStyle/>
-                    <a:p>
-                      <a:pPr>
-                        <a:defRPr sz="1000" b="0"/>
-                      </a:pPr>
-                      <a:r>
-                        <a:t>2022-04-11</a:t>
-                      </a:r>
-                    </a:p>
-                  </a:txBody>
-                  <a:tcPr/>
-                </a:tc>
-                <a:tc>
-                  <a:txBody>
-                    <a:bodyPr/>
-                    <a:lstStyle/>
-                    <a:p>
-                      <a:pPr>
-                        <a:defRPr sz="1000" b="0"/>
-                      </a:pPr>
-                      <a:r>
-                        <a:t>4 d</a:t>
-                      </a:r>
-                    </a:p>
-                  </a:txBody>
-                  <a:tcPr/>
-                </a:tc>
-                <a:tc>
-                  <a:txBody>
-                    <a:bodyPr/>
-                    <a:lstStyle/>
-                    <a:p>
-                      <a:pPr>
-                        <a:defRPr sz="1000" b="0"/>
-                      </a:pPr>
-                      <a:r>
-                        <a:t>95 %</a:t>
+                        <a:defRPr sz="1400" b="0"/>
+                      </a:pPr>
+                      <a:r>
+                        <a:t>QMM</a:t>
+                      </a:r>
+                    </a:p>
+                  </a:txBody>
+                  <a:tcPr/>
+                </a:tc>
+                <a:tc>
+                  <a:txBody>
+                    <a:bodyPr/>
+                    <a:lstStyle/>
+                    <a:p>
+                      <a:pPr>
+                        <a:defRPr sz="1400" b="0"/>
+                      </a:pPr>
+                      <a:r>
+                        <a:t>0</a:t>
+                      </a:r>
+                    </a:p>
+                  </a:txBody>
+                  <a:tcPr/>
+                </a:tc>
+                <a:tc>
+                  <a:txBody>
+                    <a:bodyPr/>
+                    <a:lstStyle/>
+                    <a:p>
+                      <a:pPr>
+                        <a:defRPr sz="1400" b="0"/>
+                      </a:pPr>
+                      <a:r>
+                        <a:t>6</a:t>
+                      </a:r>
+                    </a:p>
+                  </a:txBody>
+                  <a:tcPr/>
+                </a:tc>
+                <a:tc>
+                  <a:txBody>
+                    <a:bodyPr/>
+                    <a:lstStyle/>
+                    <a:p>
+                      <a:pPr>
+                        <a:defRPr sz="1400" b="0"/>
+                      </a:pPr>
+                      <a:r>
+                        <a:t>▲ +6</a:t>
+                      </a:r>
+                    </a:p>
+                  </a:txBody>
+                  <a:tcPr/>
+                </a:tc>
+                <a:tc>
+                  <a:txBody>
+                    <a:bodyPr/>
+                    <a:lstStyle/>
+                    <a:p>
+                      <a:pPr>
+                        <a:defRPr sz="1400" b="0"/>
+                      </a:pPr>
+                      <a:r>
+                        <a:t>▁▁▁▁▁█</a:t>
                       </a:r>
                     </a:p>
                   </a:txBody>
@@ -5055,70 +4756,70 @@
                     <a:lstStyle/>
                     <a:p>
                       <a:pPr>
-                        <a:defRPr sz="1000" b="0"/>
-                      </a:pPr>
-                      <a:r>
-                        <a:t>ENG</a:t>
-                      </a:r>
-                    </a:p>
-                  </a:txBody>
-                  <a:tcPr/>
-                </a:tc>
-                <a:tc>
-                  <a:txBody>
-                    <a:bodyPr/>
-                    <a:lstStyle/>
-                    <a:p>
-                      <a:pPr>
-                        <a:defRPr sz="1000" b="0"/>
-                      </a:pPr>
-                      <a:r>
-                        <a:t>ENG Aufgabe 063</a:t>
-                      </a:r>
-                    </a:p>
-                  </a:txBody>
-                  <a:tcPr/>
-                </a:tc>
-                <a:tc>
-                  <a:txBody>
-                    <a:bodyPr/>
-                    <a:lstStyle/>
-                    <a:p>
-                      <a:pPr>
-                        <a:defRPr sz="1000" b="0"/>
-                      </a:pPr>
-                      <a:r>
-                        <a:t>2022-04-12</a:t>
-                      </a:r>
-                    </a:p>
-                  </a:txBody>
-                  <a:tcPr/>
-                </a:tc>
-                <a:tc>
-                  <a:txBody>
-                    <a:bodyPr/>
-                    <a:lstStyle/>
-                    <a:p>
-                      <a:pPr>
-                        <a:defRPr sz="1000" b="0"/>
-                      </a:pPr>
-                      <a:r>
-                        <a:t>3 d</a:t>
-                      </a:r>
-                    </a:p>
-                  </a:txBody>
-                  <a:tcPr/>
-                </a:tc>
-                <a:tc>
-                  <a:txBody>
-                    <a:bodyPr/>
-                    <a:lstStyle/>
-                    <a:p>
-                      <a:pPr>
-                        <a:defRPr sz="1000" b="0"/>
-                      </a:pPr>
-                      <a:r>
-                        <a:t>95 %</a:t>
+                        <a:defRPr sz="1400" b="0"/>
+                      </a:pPr>
+                      <a:r>
+                        <a:t>AE-COS</a:t>
+                      </a:r>
+                    </a:p>
+                  </a:txBody>
+                  <a:tcPr/>
+                </a:tc>
+                <a:tc>
+                  <a:txBody>
+                    <a:bodyPr/>
+                    <a:lstStyle/>
+                    <a:p>
+                      <a:pPr>
+                        <a:defRPr sz="1400" b="0"/>
+                      </a:pPr>
+                      <a:r>
+                        <a:t>1</a:t>
+                      </a:r>
+                    </a:p>
+                  </a:txBody>
+                  <a:tcPr/>
+                </a:tc>
+                <a:tc>
+                  <a:txBody>
+                    <a:bodyPr/>
+                    <a:lstStyle/>
+                    <a:p>
+                      <a:pPr>
+                        <a:defRPr sz="1400" b="0"/>
+                      </a:pPr>
+                      <a:r>
+                        <a:t>5</a:t>
+                      </a:r>
+                    </a:p>
+                  </a:txBody>
+                  <a:tcPr/>
+                </a:tc>
+                <a:tc>
+                  <a:txBody>
+                    <a:bodyPr/>
+                    <a:lstStyle/>
+                    <a:p>
+                      <a:pPr>
+                        <a:defRPr sz="1400" b="0"/>
+                      </a:pPr>
+                      <a:r>
+                        <a:t>▲ +4</a:t>
+                      </a:r>
+                    </a:p>
+                  </a:txBody>
+                  <a:tcPr/>
+                </a:tc>
+                <a:tc>
+                  <a:txBody>
+                    <a:bodyPr/>
+                    <a:lstStyle/>
+                    <a:p>
+                      <a:pPr>
+                        <a:defRPr sz="1400" b="0"/>
+                      </a:pPr>
+                      <a:r>
+                        <a:t>▁▁▁▂▂█</a:t>
                       </a:r>
                     </a:p>
                   </a:txBody>
@@ -5132,70 +4833,70 @@
                     <a:lstStyle/>
                     <a:p>
                       <a:pPr>
-                        <a:defRPr sz="1000" b="0"/>
-                      </a:pPr>
-                      <a:r>
-                        <a:t>TEST</a:t>
-                      </a:r>
-                    </a:p>
-                  </a:txBody>
-                  <a:tcPr/>
-                </a:tc>
-                <a:tc>
-                  <a:txBody>
-                    <a:bodyPr/>
-                    <a:lstStyle/>
-                    <a:p>
-                      <a:pPr>
-                        <a:defRPr sz="1000" b="0"/>
-                      </a:pPr>
-                      <a:r>
-                        <a:t>TEST Aufgabe 024</a:t>
-                      </a:r>
-                    </a:p>
-                  </a:txBody>
-                  <a:tcPr/>
-                </a:tc>
-                <a:tc>
-                  <a:txBody>
-                    <a:bodyPr/>
-                    <a:lstStyle/>
-                    <a:p>
-                      <a:pPr>
-                        <a:defRPr sz="1000" b="0"/>
-                      </a:pPr>
-                      <a:r>
-                        <a:t>2022-04-12</a:t>
-                      </a:r>
-                    </a:p>
-                  </a:txBody>
-                  <a:tcPr/>
-                </a:tc>
-                <a:tc>
-                  <a:txBody>
-                    <a:bodyPr/>
-                    <a:lstStyle/>
-                    <a:p>
-                      <a:pPr>
-                        <a:defRPr sz="1000" b="0"/>
-                      </a:pPr>
-                      <a:r>
-                        <a:t>3 d</a:t>
-                      </a:r>
-                    </a:p>
-                  </a:txBody>
-                  <a:tcPr/>
-                </a:tc>
-                <a:tc>
-                  <a:txBody>
-                    <a:bodyPr/>
-                    <a:lstStyle/>
-                    <a:p>
-                      <a:pPr>
-                        <a:defRPr sz="1000" b="0"/>
-                      </a:pPr>
-                      <a:r>
-                        <a:t>95 %</a:t>
+                        <a:defRPr sz="1400" b="0"/>
+                      </a:pPr>
+                      <a:r>
+                        <a:t>PUR</a:t>
+                      </a:r>
+                    </a:p>
+                  </a:txBody>
+                  <a:tcPr/>
+                </a:tc>
+                <a:tc>
+                  <a:txBody>
+                    <a:bodyPr/>
+                    <a:lstStyle/>
+                    <a:p>
+                      <a:pPr>
+                        <a:defRPr sz="1400" b="0"/>
+                      </a:pPr>
+                      <a:r>
+                        <a:t>0</a:t>
+                      </a:r>
+                    </a:p>
+                  </a:txBody>
+                  <a:tcPr/>
+                </a:tc>
+                <a:tc>
+                  <a:txBody>
+                    <a:bodyPr/>
+                    <a:lstStyle/>
+                    <a:p>
+                      <a:pPr>
+                        <a:defRPr sz="1400" b="0"/>
+                      </a:pPr>
+                      <a:r>
+                        <a:t>5</a:t>
+                      </a:r>
+                    </a:p>
+                  </a:txBody>
+                  <a:tcPr/>
+                </a:tc>
+                <a:tc>
+                  <a:txBody>
+                    <a:bodyPr/>
+                    <a:lstStyle/>
+                    <a:p>
+                      <a:pPr>
+                        <a:defRPr sz="1400" b="0"/>
+                      </a:pPr>
+                      <a:r>
+                        <a:t>▲ +5</a:t>
+                      </a:r>
+                    </a:p>
+                  </a:txBody>
+                  <a:tcPr/>
+                </a:tc>
+                <a:tc>
+                  <a:txBody>
+                    <a:bodyPr/>
+                    <a:lstStyle/>
+                    <a:p>
+                      <a:pPr>
+                        <a:defRPr sz="1400" b="0"/>
+                      </a:pPr>
+                      <a:r>
+                        <a:t>▁▁▁▁▁█</a:t>
                       </a:r>
                     </a:p>
                   </a:txBody>
@@ -5209,301 +4910,70 @@
                     <a:lstStyle/>
                     <a:p>
                       <a:pPr>
-                        <a:defRPr sz="1000" b="0"/>
-                      </a:pPr>
-                      <a:r>
-                        <a:t>ENG-EE</a:t>
-                      </a:r>
-                    </a:p>
-                  </a:txBody>
-                  <a:tcPr/>
-                </a:tc>
-                <a:tc>
-                  <a:txBody>
-                    <a:bodyPr/>
-                    <a:lstStyle/>
-                    <a:p>
-                      <a:pPr>
-                        <a:defRPr sz="1000" b="0"/>
-                      </a:pPr>
-                      <a:r>
-                        <a:t>ENG-EE Aufgabe 012</a:t>
-                      </a:r>
-                    </a:p>
-                  </a:txBody>
-                  <a:tcPr/>
-                </a:tc>
-                <a:tc>
-                  <a:txBody>
-                    <a:bodyPr/>
-                    <a:lstStyle/>
-                    <a:p>
-                      <a:pPr>
-                        <a:defRPr sz="1000" b="0"/>
-                      </a:pPr>
-                      <a:r>
-                        <a:t>2022-04-13</a:t>
-                      </a:r>
-                    </a:p>
-                  </a:txBody>
-                  <a:tcPr/>
-                </a:tc>
-                <a:tc>
-                  <a:txBody>
-                    <a:bodyPr/>
-                    <a:lstStyle/>
-                    <a:p>
-                      <a:pPr>
-                        <a:defRPr sz="1000" b="0"/>
-                      </a:pPr>
-                      <a:r>
-                        <a:t>2 d</a:t>
-                      </a:r>
-                    </a:p>
-                  </a:txBody>
-                  <a:tcPr/>
-                </a:tc>
-                <a:tc>
-                  <a:txBody>
-                    <a:bodyPr/>
-                    <a:lstStyle/>
-                    <a:p>
-                      <a:pPr>
-                        <a:defRPr sz="1000" b="0"/>
-                      </a:pPr>
-                      <a:r>
-                        <a:t>95 %</a:t>
-                      </a:r>
-                    </a:p>
-                  </a:txBody>
-                  <a:tcPr/>
-                </a:tc>
-              </a:tr>
-              <a:tr h="365760">
-                <a:tc>
-                  <a:txBody>
-                    <a:bodyPr/>
-                    <a:lstStyle/>
-                    <a:p>
-                      <a:pPr>
-                        <a:defRPr sz="1000" b="0"/>
-                      </a:pPr>
-                      <a:r>
-                        <a:t>QMM</a:t>
-                      </a:r>
-                    </a:p>
-                  </a:txBody>
-                  <a:tcPr/>
-                </a:tc>
-                <a:tc>
-                  <a:txBody>
-                    <a:bodyPr/>
-                    <a:lstStyle/>
-                    <a:p>
-                      <a:pPr>
-                        <a:defRPr sz="1000" b="0"/>
-                      </a:pPr>
-                      <a:r>
-                        <a:t>QMM Aufgabe 015</a:t>
-                      </a:r>
-                    </a:p>
-                  </a:txBody>
-                  <a:tcPr/>
-                </a:tc>
-                <a:tc>
-                  <a:txBody>
-                    <a:bodyPr/>
-                    <a:lstStyle/>
-                    <a:p>
-                      <a:pPr>
-                        <a:defRPr sz="1000" b="0"/>
-                      </a:pPr>
-                      <a:r>
-                        <a:t>2022-04-13</a:t>
-                      </a:r>
-                    </a:p>
-                  </a:txBody>
-                  <a:tcPr/>
-                </a:tc>
-                <a:tc>
-                  <a:txBody>
-                    <a:bodyPr/>
-                    <a:lstStyle/>
-                    <a:p>
-                      <a:pPr>
-                        <a:defRPr sz="1000" b="0"/>
-                      </a:pPr>
-                      <a:r>
-                        <a:t>2 d</a:t>
-                      </a:r>
-                    </a:p>
-                  </a:txBody>
-                  <a:tcPr/>
-                </a:tc>
-                <a:tc>
-                  <a:txBody>
-                    <a:bodyPr/>
-                    <a:lstStyle/>
-                    <a:p>
-                      <a:pPr>
-                        <a:defRPr sz="1000" b="0"/>
-                      </a:pPr>
-                      <a:r>
-                        <a:t>95 %</a:t>
-                      </a:r>
-                    </a:p>
-                  </a:txBody>
-                  <a:tcPr/>
-                </a:tc>
-              </a:tr>
-              <a:tr h="365760">
-                <a:tc>
-                  <a:txBody>
-                    <a:bodyPr/>
-                    <a:lstStyle/>
-                    <a:p>
-                      <a:pPr>
-                        <a:defRPr sz="1000" b="0"/>
-                      </a:pPr>
-                      <a:r>
-                        <a:t>TEST</a:t>
-                      </a:r>
-                    </a:p>
-                  </a:txBody>
-                  <a:tcPr/>
-                </a:tc>
-                <a:tc>
-                  <a:txBody>
-                    <a:bodyPr/>
-                    <a:lstStyle/>
-                    <a:p>
-                      <a:pPr>
-                        <a:defRPr sz="1000" b="0"/>
-                      </a:pPr>
-                      <a:r>
-                        <a:t>TEST Aufgabe 078</a:t>
-                      </a:r>
-                    </a:p>
-                  </a:txBody>
-                  <a:tcPr/>
-                </a:tc>
-                <a:tc>
-                  <a:txBody>
-                    <a:bodyPr/>
-                    <a:lstStyle/>
-                    <a:p>
-                      <a:pPr>
-                        <a:defRPr sz="1000" b="0"/>
-                      </a:pPr>
-                      <a:r>
-                        <a:t>2022-04-13</a:t>
-                      </a:r>
-                    </a:p>
-                  </a:txBody>
-                  <a:tcPr/>
-                </a:tc>
-                <a:tc>
-                  <a:txBody>
-                    <a:bodyPr/>
-                    <a:lstStyle/>
-                    <a:p>
-                      <a:pPr>
-                        <a:defRPr sz="1000" b="0"/>
-                      </a:pPr>
-                      <a:r>
-                        <a:t>2 d</a:t>
-                      </a:r>
-                    </a:p>
-                  </a:txBody>
-                  <a:tcPr/>
-                </a:tc>
-                <a:tc>
-                  <a:txBody>
-                    <a:bodyPr/>
-                    <a:lstStyle/>
-                    <a:p>
-                      <a:pPr>
-                        <a:defRPr sz="1000" b="0"/>
-                      </a:pPr>
-                      <a:r>
-                        <a:t>95 %</a:t>
-                      </a:r>
-                    </a:p>
-                  </a:txBody>
-                  <a:tcPr/>
-                </a:tc>
-              </a:tr>
-              <a:tr h="365760">
-                <a:tc>
-                  <a:txBody>
-                    <a:bodyPr/>
-                    <a:lstStyle/>
-                    <a:p>
-                      <a:pPr>
-                        <a:defRPr sz="1000" b="0"/>
-                      </a:pPr>
-                      <a:r>
-                        <a:t>AE-COS</a:t>
-                      </a:r>
-                    </a:p>
-                  </a:txBody>
-                  <a:tcPr/>
-                </a:tc>
-                <a:tc>
-                  <a:txBody>
-                    <a:bodyPr/>
-                    <a:lstStyle/>
-                    <a:p>
-                      <a:pPr>
-                        <a:defRPr sz="1000" b="0"/>
-                      </a:pPr>
-                      <a:r>
-                        <a:t>AE-COS Aufgabe 082</a:t>
-                      </a:r>
-                    </a:p>
-                  </a:txBody>
-                  <a:tcPr/>
-                </a:tc>
-                <a:tc>
-                  <a:txBody>
-                    <a:bodyPr/>
-                    <a:lstStyle/>
-                    <a:p>
-                      <a:pPr>
-                        <a:defRPr sz="1000" b="0"/>
-                      </a:pPr>
-                      <a:r>
-                        <a:t>2022-04-14</a:t>
-                      </a:r>
-                    </a:p>
-                  </a:txBody>
-                  <a:tcPr/>
-                </a:tc>
-                <a:tc>
-                  <a:txBody>
-                    <a:bodyPr/>
-                    <a:lstStyle/>
-                    <a:p>
-                      <a:pPr>
-                        <a:defRPr sz="1000" b="0"/>
-                      </a:pPr>
-                      <a:r>
-                        <a:t>1 d</a:t>
-                      </a:r>
-                    </a:p>
-                  </a:txBody>
-                  <a:tcPr/>
-                </a:tc>
-                <a:tc>
-                  <a:txBody>
-                    <a:bodyPr/>
-                    <a:lstStyle/>
-                    <a:p>
-                      <a:pPr>
-                        <a:defRPr sz="1000" b="0"/>
-                      </a:pPr>
-                      <a:r>
-                        <a:t>95 %</a:t>
+                        <a:defRPr sz="1400" b="0"/>
+                      </a:pPr>
+                      <a:r>
+                        <a:t>AE-TEF</a:t>
+                      </a:r>
+                    </a:p>
+                  </a:txBody>
+                  <a:tcPr/>
+                </a:tc>
+                <a:tc>
+                  <a:txBody>
+                    <a:bodyPr/>
+                    <a:lstStyle/>
+                    <a:p>
+                      <a:pPr>
+                        <a:defRPr sz="1400" b="0"/>
+                      </a:pPr>
+                      <a:r>
+                        <a:t>1</a:t>
+                      </a:r>
+                    </a:p>
+                  </a:txBody>
+                  <a:tcPr/>
+                </a:tc>
+                <a:tc>
+                  <a:txBody>
+                    <a:bodyPr/>
+                    <a:lstStyle/>
+                    <a:p>
+                      <a:pPr>
+                        <a:defRPr sz="1400" b="0"/>
+                      </a:pPr>
+                      <a:r>
+                        <a:t>4</a:t>
+                      </a:r>
+                    </a:p>
+                  </a:txBody>
+                  <a:tcPr/>
+                </a:tc>
+                <a:tc>
+                  <a:txBody>
+                    <a:bodyPr/>
+                    <a:lstStyle/>
+                    <a:p>
+                      <a:pPr>
+                        <a:defRPr sz="1400" b="0"/>
+                      </a:pPr>
+                      <a:r>
+                        <a:t>▲ +3</a:t>
+                      </a:r>
+                    </a:p>
+                  </a:txBody>
+                  <a:tcPr/>
+                </a:tc>
+                <a:tc>
+                  <a:txBody>
+                    <a:bodyPr/>
+                    <a:lstStyle/>
+                    <a:p>
+                      <a:pPr>
+                        <a:defRPr sz="1400" b="0"/>
+                      </a:pPr>
+                      <a:r>
+                        <a:t>▁▁▁▃▃█</a:t>
                       </a:r>
                     </a:p>
                   </a:txBody>
@@ -5544,7 +5014,7 @@
               </a:defRPr>
             </a:pPr>
             <a:r>
-              <a:t>J.A. Project Engineering · PJM Project Review · Stand 2022-04-15</a:t>
+              <a:t>J.A. Project Engineering · PJM Project Review · Stand 2026-10-02</a:t>
             </a:r>
           </a:p>
         </p:txBody>
@@ -5597,7 +5067,7 @@
               </a:defRPr>
             </a:pPr>
             <a:r>
-              <a:t>Veränderungen KW14 → KW15</a:t>
+              <a:t>Überfällige Aufgaben – 2026-10-02 (45)</a:t>
             </a:r>
           </a:p>
         </p:txBody>
@@ -5645,6 +5115,1475 @@
           </a:p>
         </p:txBody>
       </p:sp>
+      <p:graphicFrame>
+        <p:nvGraphicFramePr>
+          <p:cNvPr id="4" name="Table 3"/>
+          <p:cNvGraphicFramePr>
+            <a:graphicFrameLocks noGrp="1"/>
+          </p:cNvGraphicFramePr>
+          <p:nvPr/>
+        </p:nvGraphicFramePr>
+        <p:xfrm>
+          <a:off x="457200" y="1097280"/>
+          <a:ext cx="11247120" cy="6217920"/>
+        </p:xfrm>
+        <a:graphic>
+          <a:graphicData uri="http://schemas.openxmlformats.org/drawingml/2006/table">
+            <a:tbl>
+              <a:tblPr firstRow="1" bandRow="1">
+                <a:tableStyleId>{5C22544A-7EE6-4342-B048-85BDC9FD1C3A}</a:tableStyleId>
+              </a:tblPr>
+              <a:tblGrid>
+                <a:gridCol w="1463040"/>
+                <a:gridCol w="5943600"/>
+                <a:gridCol w="1645920"/>
+                <a:gridCol w="1097280"/>
+                <a:gridCol w="1097280"/>
+              </a:tblGrid>
+              <a:tr h="365760">
+                <a:tc>
+                  <a:txBody>
+                    <a:bodyPr/>
+                    <a:lstStyle/>
+                    <a:p>
+                      <a:pPr>
+                        <a:defRPr sz="1000" b="1"/>
+                      </a:pPr>
+                      <a:r>
+                        <a:t>Abteilung</a:t>
+                      </a:r>
+                    </a:p>
+                  </a:txBody>
+                  <a:tcPr/>
+                </a:tc>
+                <a:tc>
+                  <a:txBody>
+                    <a:bodyPr/>
+                    <a:lstStyle/>
+                    <a:p>
+                      <a:pPr>
+                        <a:defRPr sz="1000" b="1"/>
+                      </a:pPr>
+                      <a:r>
+                        <a:t>Aufgabe</a:t>
+                      </a:r>
+                    </a:p>
+                  </a:txBody>
+                  <a:tcPr/>
+                </a:tc>
+                <a:tc>
+                  <a:txBody>
+                    <a:bodyPr/>
+                    <a:lstStyle/>
+                    <a:p>
+                      <a:pPr>
+                        <a:defRPr sz="1000" b="1"/>
+                      </a:pPr>
+                      <a:r>
+                        <a:t>Geplantes Ende</a:t>
+                      </a:r>
+                    </a:p>
+                  </a:txBody>
+                  <a:tcPr/>
+                </a:tc>
+                <a:tc>
+                  <a:txBody>
+                    <a:bodyPr/>
+                    <a:lstStyle/>
+                    <a:p>
+                      <a:pPr>
+                        <a:defRPr sz="1000" b="1"/>
+                      </a:pPr>
+                      <a:r>
+                        <a:t>Verzug</a:t>
+                      </a:r>
+                    </a:p>
+                  </a:txBody>
+                  <a:tcPr/>
+                </a:tc>
+                <a:tc>
+                  <a:txBody>
+                    <a:bodyPr/>
+                    <a:lstStyle/>
+                    <a:p>
+                      <a:pPr>
+                        <a:defRPr sz="1000" b="1"/>
+                      </a:pPr>
+                      <a:r>
+                        <a:t>Fortschritt</a:t>
+                      </a:r>
+                    </a:p>
+                  </a:txBody>
+                  <a:tcPr/>
+                </a:tc>
+              </a:tr>
+              <a:tr h="365760">
+                <a:tc>
+                  <a:txBody>
+                    <a:bodyPr/>
+                    <a:lstStyle/>
+                    <a:p>
+                      <a:pPr>
+                        <a:defRPr sz="1000" b="0"/>
+                      </a:pPr>
+                      <a:r>
+                        <a:t>AE-COS</a:t>
+                      </a:r>
+                    </a:p>
+                  </a:txBody>
+                  <a:tcPr/>
+                </a:tc>
+                <a:tc>
+                  <a:txBody>
+                    <a:bodyPr/>
+                    <a:lstStyle/>
+                    <a:p>
+                      <a:pPr>
+                        <a:defRPr sz="1000" b="0"/>
+                      </a:pPr>
+                      <a:r>
+                        <a:t>AE-COS Aufgabe 003</a:t>
+                      </a:r>
+                    </a:p>
+                  </a:txBody>
+                  <a:tcPr/>
+                </a:tc>
+                <a:tc>
+                  <a:txBody>
+                    <a:bodyPr/>
+                    <a:lstStyle/>
+                    <a:p>
+                      <a:pPr>
+                        <a:defRPr sz="1000" b="0"/>
+                      </a:pPr>
+                      <a:r>
+                        <a:t>2022-03-30</a:t>
+                      </a:r>
+                    </a:p>
+                  </a:txBody>
+                  <a:tcPr/>
+                </a:tc>
+                <a:tc>
+                  <a:txBody>
+                    <a:bodyPr/>
+                    <a:lstStyle/>
+                    <a:p>
+                      <a:pPr>
+                        <a:defRPr sz="1000" b="0"/>
+                      </a:pPr>
+                      <a:r>
+                        <a:t>1647 d</a:t>
+                      </a:r>
+                    </a:p>
+                  </a:txBody>
+                  <a:tcPr/>
+                </a:tc>
+                <a:tc>
+                  <a:txBody>
+                    <a:bodyPr/>
+                    <a:lstStyle/>
+                    <a:p>
+                      <a:pPr>
+                        <a:defRPr sz="1000" b="0"/>
+                      </a:pPr>
+                      <a:r>
+                        <a:t>95 %</a:t>
+                      </a:r>
+                    </a:p>
+                  </a:txBody>
+                  <a:tcPr/>
+                </a:tc>
+              </a:tr>
+              <a:tr h="365760">
+                <a:tc>
+                  <a:txBody>
+                    <a:bodyPr/>
+                    <a:lstStyle/>
+                    <a:p>
+                      <a:pPr>
+                        <a:defRPr sz="1000" b="0"/>
+                      </a:pPr>
+                      <a:r>
+                        <a:t>AA</a:t>
+                      </a:r>
+                    </a:p>
+                  </a:txBody>
+                  <a:tcPr/>
+                </a:tc>
+                <a:tc>
+                  <a:txBody>
+                    <a:bodyPr/>
+                    <a:lstStyle/>
+                    <a:p>
+                      <a:pPr>
+                        <a:defRPr sz="1000" b="0"/>
+                      </a:pPr>
+                      <a:r>
+                        <a:t>AA Aufgabe 075</a:t>
+                      </a:r>
+                    </a:p>
+                  </a:txBody>
+                  <a:tcPr/>
+                </a:tc>
+                <a:tc>
+                  <a:txBody>
+                    <a:bodyPr/>
+                    <a:lstStyle/>
+                    <a:p>
+                      <a:pPr>
+                        <a:defRPr sz="1000" b="0"/>
+                      </a:pPr>
+                      <a:r>
+                        <a:t>2022-04-11</a:t>
+                      </a:r>
+                    </a:p>
+                  </a:txBody>
+                  <a:tcPr/>
+                </a:tc>
+                <a:tc>
+                  <a:txBody>
+                    <a:bodyPr/>
+                    <a:lstStyle/>
+                    <a:p>
+                      <a:pPr>
+                        <a:defRPr sz="1000" b="0"/>
+                      </a:pPr>
+                      <a:r>
+                        <a:t>1635 d</a:t>
+                      </a:r>
+                    </a:p>
+                  </a:txBody>
+                  <a:tcPr/>
+                </a:tc>
+                <a:tc>
+                  <a:txBody>
+                    <a:bodyPr/>
+                    <a:lstStyle/>
+                    <a:p>
+                      <a:pPr>
+                        <a:defRPr sz="1000" b="0"/>
+                      </a:pPr>
+                      <a:r>
+                        <a:t>95 %</a:t>
+                      </a:r>
+                    </a:p>
+                  </a:txBody>
+                  <a:tcPr/>
+                </a:tc>
+              </a:tr>
+              <a:tr h="365760">
+                <a:tc>
+                  <a:txBody>
+                    <a:bodyPr/>
+                    <a:lstStyle/>
+                    <a:p>
+                      <a:pPr>
+                        <a:defRPr sz="1000" b="0"/>
+                      </a:pPr>
+                      <a:r>
+                        <a:t>ENG</a:t>
+                      </a:r>
+                    </a:p>
+                  </a:txBody>
+                  <a:tcPr/>
+                </a:tc>
+                <a:tc>
+                  <a:txBody>
+                    <a:bodyPr/>
+                    <a:lstStyle/>
+                    <a:p>
+                      <a:pPr>
+                        <a:defRPr sz="1000" b="0"/>
+                      </a:pPr>
+                      <a:r>
+                        <a:t>ENG Aufgabe 063</a:t>
+                      </a:r>
+                    </a:p>
+                  </a:txBody>
+                  <a:tcPr/>
+                </a:tc>
+                <a:tc>
+                  <a:txBody>
+                    <a:bodyPr/>
+                    <a:lstStyle/>
+                    <a:p>
+                      <a:pPr>
+                        <a:defRPr sz="1000" b="0"/>
+                      </a:pPr>
+                      <a:r>
+                        <a:t>2022-04-12</a:t>
+                      </a:r>
+                    </a:p>
+                  </a:txBody>
+                  <a:tcPr/>
+                </a:tc>
+                <a:tc>
+                  <a:txBody>
+                    <a:bodyPr/>
+                    <a:lstStyle/>
+                    <a:p>
+                      <a:pPr>
+                        <a:defRPr sz="1000" b="0"/>
+                      </a:pPr>
+                      <a:r>
+                        <a:t>1634 d</a:t>
+                      </a:r>
+                    </a:p>
+                  </a:txBody>
+                  <a:tcPr/>
+                </a:tc>
+                <a:tc>
+                  <a:txBody>
+                    <a:bodyPr/>
+                    <a:lstStyle/>
+                    <a:p>
+                      <a:pPr>
+                        <a:defRPr sz="1000" b="0"/>
+                      </a:pPr>
+                      <a:r>
+                        <a:t>95 %</a:t>
+                      </a:r>
+                    </a:p>
+                  </a:txBody>
+                  <a:tcPr/>
+                </a:tc>
+              </a:tr>
+              <a:tr h="365760">
+                <a:tc>
+                  <a:txBody>
+                    <a:bodyPr/>
+                    <a:lstStyle/>
+                    <a:p>
+                      <a:pPr>
+                        <a:defRPr sz="1000" b="0"/>
+                      </a:pPr>
+                      <a:r>
+                        <a:t>TEST</a:t>
+                      </a:r>
+                    </a:p>
+                  </a:txBody>
+                  <a:tcPr/>
+                </a:tc>
+                <a:tc>
+                  <a:txBody>
+                    <a:bodyPr/>
+                    <a:lstStyle/>
+                    <a:p>
+                      <a:pPr>
+                        <a:defRPr sz="1000" b="0"/>
+                      </a:pPr>
+                      <a:r>
+                        <a:t>TEST Aufgabe 024</a:t>
+                      </a:r>
+                    </a:p>
+                  </a:txBody>
+                  <a:tcPr/>
+                </a:tc>
+                <a:tc>
+                  <a:txBody>
+                    <a:bodyPr/>
+                    <a:lstStyle/>
+                    <a:p>
+                      <a:pPr>
+                        <a:defRPr sz="1000" b="0"/>
+                      </a:pPr>
+                      <a:r>
+                        <a:t>2022-04-12</a:t>
+                      </a:r>
+                    </a:p>
+                  </a:txBody>
+                  <a:tcPr/>
+                </a:tc>
+                <a:tc>
+                  <a:txBody>
+                    <a:bodyPr/>
+                    <a:lstStyle/>
+                    <a:p>
+                      <a:pPr>
+                        <a:defRPr sz="1000" b="0"/>
+                      </a:pPr>
+                      <a:r>
+                        <a:t>1634 d</a:t>
+                      </a:r>
+                    </a:p>
+                  </a:txBody>
+                  <a:tcPr/>
+                </a:tc>
+                <a:tc>
+                  <a:txBody>
+                    <a:bodyPr/>
+                    <a:lstStyle/>
+                    <a:p>
+                      <a:pPr>
+                        <a:defRPr sz="1000" b="0"/>
+                      </a:pPr>
+                      <a:r>
+                        <a:t>95 %</a:t>
+                      </a:r>
+                    </a:p>
+                  </a:txBody>
+                  <a:tcPr/>
+                </a:tc>
+              </a:tr>
+              <a:tr h="365760">
+                <a:tc>
+                  <a:txBody>
+                    <a:bodyPr/>
+                    <a:lstStyle/>
+                    <a:p>
+                      <a:pPr>
+                        <a:defRPr sz="1000" b="0"/>
+                      </a:pPr>
+                      <a:r>
+                        <a:t>ENG-EE</a:t>
+                      </a:r>
+                    </a:p>
+                  </a:txBody>
+                  <a:tcPr/>
+                </a:tc>
+                <a:tc>
+                  <a:txBody>
+                    <a:bodyPr/>
+                    <a:lstStyle/>
+                    <a:p>
+                      <a:pPr>
+                        <a:defRPr sz="1000" b="0"/>
+                      </a:pPr>
+                      <a:r>
+                        <a:t>ENG-EE Aufgabe 012</a:t>
+                      </a:r>
+                    </a:p>
+                  </a:txBody>
+                  <a:tcPr/>
+                </a:tc>
+                <a:tc>
+                  <a:txBody>
+                    <a:bodyPr/>
+                    <a:lstStyle/>
+                    <a:p>
+                      <a:pPr>
+                        <a:defRPr sz="1000" b="0"/>
+                      </a:pPr>
+                      <a:r>
+                        <a:t>2022-04-13</a:t>
+                      </a:r>
+                    </a:p>
+                  </a:txBody>
+                  <a:tcPr/>
+                </a:tc>
+                <a:tc>
+                  <a:txBody>
+                    <a:bodyPr/>
+                    <a:lstStyle/>
+                    <a:p>
+                      <a:pPr>
+                        <a:defRPr sz="1000" b="0"/>
+                      </a:pPr>
+                      <a:r>
+                        <a:t>1633 d</a:t>
+                      </a:r>
+                    </a:p>
+                  </a:txBody>
+                  <a:tcPr/>
+                </a:tc>
+                <a:tc>
+                  <a:txBody>
+                    <a:bodyPr/>
+                    <a:lstStyle/>
+                    <a:p>
+                      <a:pPr>
+                        <a:defRPr sz="1000" b="0"/>
+                      </a:pPr>
+                      <a:r>
+                        <a:t>95 %</a:t>
+                      </a:r>
+                    </a:p>
+                  </a:txBody>
+                  <a:tcPr/>
+                </a:tc>
+              </a:tr>
+              <a:tr h="365760">
+                <a:tc>
+                  <a:txBody>
+                    <a:bodyPr/>
+                    <a:lstStyle/>
+                    <a:p>
+                      <a:pPr>
+                        <a:defRPr sz="1000" b="0"/>
+                      </a:pPr>
+                      <a:r>
+                        <a:t>QMM</a:t>
+                      </a:r>
+                    </a:p>
+                  </a:txBody>
+                  <a:tcPr/>
+                </a:tc>
+                <a:tc>
+                  <a:txBody>
+                    <a:bodyPr/>
+                    <a:lstStyle/>
+                    <a:p>
+                      <a:pPr>
+                        <a:defRPr sz="1000" b="0"/>
+                      </a:pPr>
+                      <a:r>
+                        <a:t>QMM Aufgabe 015</a:t>
+                      </a:r>
+                    </a:p>
+                  </a:txBody>
+                  <a:tcPr/>
+                </a:tc>
+                <a:tc>
+                  <a:txBody>
+                    <a:bodyPr/>
+                    <a:lstStyle/>
+                    <a:p>
+                      <a:pPr>
+                        <a:defRPr sz="1000" b="0"/>
+                      </a:pPr>
+                      <a:r>
+                        <a:t>2022-04-13</a:t>
+                      </a:r>
+                    </a:p>
+                  </a:txBody>
+                  <a:tcPr/>
+                </a:tc>
+                <a:tc>
+                  <a:txBody>
+                    <a:bodyPr/>
+                    <a:lstStyle/>
+                    <a:p>
+                      <a:pPr>
+                        <a:defRPr sz="1000" b="0"/>
+                      </a:pPr>
+                      <a:r>
+                        <a:t>1633 d</a:t>
+                      </a:r>
+                    </a:p>
+                  </a:txBody>
+                  <a:tcPr/>
+                </a:tc>
+                <a:tc>
+                  <a:txBody>
+                    <a:bodyPr/>
+                    <a:lstStyle/>
+                    <a:p>
+                      <a:pPr>
+                        <a:defRPr sz="1000" b="0"/>
+                      </a:pPr>
+                      <a:r>
+                        <a:t>95 %</a:t>
+                      </a:r>
+                    </a:p>
+                  </a:txBody>
+                  <a:tcPr/>
+                </a:tc>
+              </a:tr>
+              <a:tr h="365760">
+                <a:tc>
+                  <a:txBody>
+                    <a:bodyPr/>
+                    <a:lstStyle/>
+                    <a:p>
+                      <a:pPr>
+                        <a:defRPr sz="1000" b="0"/>
+                      </a:pPr>
+                      <a:r>
+                        <a:t>TEST</a:t>
+                      </a:r>
+                    </a:p>
+                  </a:txBody>
+                  <a:tcPr/>
+                </a:tc>
+                <a:tc>
+                  <a:txBody>
+                    <a:bodyPr/>
+                    <a:lstStyle/>
+                    <a:p>
+                      <a:pPr>
+                        <a:defRPr sz="1000" b="0"/>
+                      </a:pPr>
+                      <a:r>
+                        <a:t>TEST Aufgabe 078</a:t>
+                      </a:r>
+                    </a:p>
+                  </a:txBody>
+                  <a:tcPr/>
+                </a:tc>
+                <a:tc>
+                  <a:txBody>
+                    <a:bodyPr/>
+                    <a:lstStyle/>
+                    <a:p>
+                      <a:pPr>
+                        <a:defRPr sz="1000" b="0"/>
+                      </a:pPr>
+                      <a:r>
+                        <a:t>2022-04-13</a:t>
+                      </a:r>
+                    </a:p>
+                  </a:txBody>
+                  <a:tcPr/>
+                </a:tc>
+                <a:tc>
+                  <a:txBody>
+                    <a:bodyPr/>
+                    <a:lstStyle/>
+                    <a:p>
+                      <a:pPr>
+                        <a:defRPr sz="1000" b="0"/>
+                      </a:pPr>
+                      <a:r>
+                        <a:t>1633 d</a:t>
+                      </a:r>
+                    </a:p>
+                  </a:txBody>
+                  <a:tcPr/>
+                </a:tc>
+                <a:tc>
+                  <a:txBody>
+                    <a:bodyPr/>
+                    <a:lstStyle/>
+                    <a:p>
+                      <a:pPr>
+                        <a:defRPr sz="1000" b="0"/>
+                      </a:pPr>
+                      <a:r>
+                        <a:t>95 %</a:t>
+                      </a:r>
+                    </a:p>
+                  </a:txBody>
+                  <a:tcPr/>
+                </a:tc>
+              </a:tr>
+              <a:tr h="365760">
+                <a:tc>
+                  <a:txBody>
+                    <a:bodyPr/>
+                    <a:lstStyle/>
+                    <a:p>
+                      <a:pPr>
+                        <a:defRPr sz="1000" b="0"/>
+                      </a:pPr>
+                      <a:r>
+                        <a:t>AE-COS</a:t>
+                      </a:r>
+                    </a:p>
+                  </a:txBody>
+                  <a:tcPr/>
+                </a:tc>
+                <a:tc>
+                  <a:txBody>
+                    <a:bodyPr/>
+                    <a:lstStyle/>
+                    <a:p>
+                      <a:pPr>
+                        <a:defRPr sz="1000" b="0"/>
+                      </a:pPr>
+                      <a:r>
+                        <a:t>AE-COS Aufgabe 082</a:t>
+                      </a:r>
+                    </a:p>
+                  </a:txBody>
+                  <a:tcPr/>
+                </a:tc>
+                <a:tc>
+                  <a:txBody>
+                    <a:bodyPr/>
+                    <a:lstStyle/>
+                    <a:p>
+                      <a:pPr>
+                        <a:defRPr sz="1000" b="0"/>
+                      </a:pPr>
+                      <a:r>
+                        <a:t>2022-04-14</a:t>
+                      </a:r>
+                    </a:p>
+                  </a:txBody>
+                  <a:tcPr/>
+                </a:tc>
+                <a:tc>
+                  <a:txBody>
+                    <a:bodyPr/>
+                    <a:lstStyle/>
+                    <a:p>
+                      <a:pPr>
+                        <a:defRPr sz="1000" b="0"/>
+                      </a:pPr>
+                      <a:r>
+                        <a:t>1632 d</a:t>
+                      </a:r>
+                    </a:p>
+                  </a:txBody>
+                  <a:tcPr/>
+                </a:tc>
+                <a:tc>
+                  <a:txBody>
+                    <a:bodyPr/>
+                    <a:lstStyle/>
+                    <a:p>
+                      <a:pPr>
+                        <a:defRPr sz="1000" b="0"/>
+                      </a:pPr>
+                      <a:r>
+                        <a:t>95 %</a:t>
+                      </a:r>
+                    </a:p>
+                  </a:txBody>
+                  <a:tcPr/>
+                </a:tc>
+              </a:tr>
+              <a:tr h="365760">
+                <a:tc>
+                  <a:txBody>
+                    <a:bodyPr/>
+                    <a:lstStyle/>
+                    <a:p>
+                      <a:pPr>
+                        <a:defRPr sz="1000" b="0"/>
+                      </a:pPr>
+                      <a:r>
+                        <a:t>AE-QMM</a:t>
+                      </a:r>
+                    </a:p>
+                  </a:txBody>
+                  <a:tcPr/>
+                </a:tc>
+                <a:tc>
+                  <a:txBody>
+                    <a:bodyPr/>
+                    <a:lstStyle/>
+                    <a:p>
+                      <a:pPr>
+                        <a:defRPr sz="1000" b="0"/>
+                      </a:pPr>
+                      <a:r>
+                        <a:t>AE-QMM Aufgabe 046</a:t>
+                      </a:r>
+                    </a:p>
+                  </a:txBody>
+                  <a:tcPr/>
+                </a:tc>
+                <a:tc>
+                  <a:txBody>
+                    <a:bodyPr/>
+                    <a:lstStyle/>
+                    <a:p>
+                      <a:pPr>
+                        <a:defRPr sz="1000" b="0"/>
+                      </a:pPr>
+                      <a:r>
+                        <a:t>2022-04-17</a:t>
+                      </a:r>
+                    </a:p>
+                  </a:txBody>
+                  <a:tcPr/>
+                </a:tc>
+                <a:tc>
+                  <a:txBody>
+                    <a:bodyPr/>
+                    <a:lstStyle/>
+                    <a:p>
+                      <a:pPr>
+                        <a:defRPr sz="1000" b="0"/>
+                      </a:pPr>
+                      <a:r>
+                        <a:t>1629 d</a:t>
+                      </a:r>
+                    </a:p>
+                  </a:txBody>
+                  <a:tcPr/>
+                </a:tc>
+                <a:tc>
+                  <a:txBody>
+                    <a:bodyPr/>
+                    <a:lstStyle/>
+                    <a:p>
+                      <a:pPr>
+                        <a:defRPr sz="1000" b="0"/>
+                      </a:pPr>
+                      <a:r>
+                        <a:t>50 %</a:t>
+                      </a:r>
+                    </a:p>
+                  </a:txBody>
+                  <a:tcPr/>
+                </a:tc>
+              </a:tr>
+              <a:tr h="365760">
+                <a:tc>
+                  <a:txBody>
+                    <a:bodyPr/>
+                    <a:lstStyle/>
+                    <a:p>
+                      <a:pPr>
+                        <a:defRPr sz="1000" b="0"/>
+                      </a:pPr>
+                      <a:r>
+                        <a:t>TEST</a:t>
+                      </a:r>
+                    </a:p>
+                  </a:txBody>
+                  <a:tcPr/>
+                </a:tc>
+                <a:tc>
+                  <a:txBody>
+                    <a:bodyPr/>
+                    <a:lstStyle/>
+                    <a:p>
+                      <a:pPr>
+                        <a:defRPr sz="1000" b="0"/>
+                      </a:pPr>
+                      <a:r>
+                        <a:t>TEST Aufgabe 041</a:t>
+                      </a:r>
+                    </a:p>
+                  </a:txBody>
+                  <a:tcPr/>
+                </a:tc>
+                <a:tc>
+                  <a:txBody>
+                    <a:bodyPr/>
+                    <a:lstStyle/>
+                    <a:p>
+                      <a:pPr>
+                        <a:defRPr sz="1000" b="0"/>
+                      </a:pPr>
+                      <a:r>
+                        <a:t>2022-04-17</a:t>
+                      </a:r>
+                    </a:p>
+                  </a:txBody>
+                  <a:tcPr/>
+                </a:tc>
+                <a:tc>
+                  <a:txBody>
+                    <a:bodyPr/>
+                    <a:lstStyle/>
+                    <a:p>
+                      <a:pPr>
+                        <a:defRPr sz="1000" b="0"/>
+                      </a:pPr>
+                      <a:r>
+                        <a:t>1629 d</a:t>
+                      </a:r>
+                    </a:p>
+                  </a:txBody>
+                  <a:tcPr/>
+                </a:tc>
+                <a:tc>
+                  <a:txBody>
+                    <a:bodyPr/>
+                    <a:lstStyle/>
+                    <a:p>
+                      <a:pPr>
+                        <a:defRPr sz="1000" b="0"/>
+                      </a:pPr>
+                      <a:r>
+                        <a:t>83 %</a:t>
+                      </a:r>
+                    </a:p>
+                  </a:txBody>
+                  <a:tcPr/>
+                </a:tc>
+              </a:tr>
+              <a:tr h="365760">
+                <a:tc>
+                  <a:txBody>
+                    <a:bodyPr/>
+                    <a:lstStyle/>
+                    <a:p>
+                      <a:pPr>
+                        <a:defRPr sz="1000" b="0"/>
+                      </a:pPr>
+                      <a:r>
+                        <a:t>AE-TEF</a:t>
+                      </a:r>
+                    </a:p>
+                  </a:txBody>
+                  <a:tcPr/>
+                </a:tc>
+                <a:tc>
+                  <a:txBody>
+                    <a:bodyPr/>
+                    <a:lstStyle/>
+                    <a:p>
+                      <a:pPr>
+                        <a:defRPr sz="1000" b="0"/>
+                      </a:pPr>
+                      <a:r>
+                        <a:t>AE-TEF Aufgabe 037</a:t>
+                      </a:r>
+                    </a:p>
+                  </a:txBody>
+                  <a:tcPr/>
+                </a:tc>
+                <a:tc>
+                  <a:txBody>
+                    <a:bodyPr/>
+                    <a:lstStyle/>
+                    <a:p>
+                      <a:pPr>
+                        <a:defRPr sz="1000" b="0"/>
+                      </a:pPr>
+                      <a:r>
+                        <a:t>2022-04-18</a:t>
+                      </a:r>
+                    </a:p>
+                  </a:txBody>
+                  <a:tcPr/>
+                </a:tc>
+                <a:tc>
+                  <a:txBody>
+                    <a:bodyPr/>
+                    <a:lstStyle/>
+                    <a:p>
+                      <a:pPr>
+                        <a:defRPr sz="1000" b="0"/>
+                      </a:pPr>
+                      <a:r>
+                        <a:t>1628 d</a:t>
+                      </a:r>
+                    </a:p>
+                  </a:txBody>
+                  <a:tcPr/>
+                </a:tc>
+                <a:tc>
+                  <a:txBody>
+                    <a:bodyPr/>
+                    <a:lstStyle/>
+                    <a:p>
+                      <a:pPr>
+                        <a:defRPr sz="1000" b="0"/>
+                      </a:pPr>
+                      <a:r>
+                        <a:t>77 %</a:t>
+                      </a:r>
+                    </a:p>
+                  </a:txBody>
+                  <a:tcPr/>
+                </a:tc>
+              </a:tr>
+              <a:tr h="365760">
+                <a:tc>
+                  <a:txBody>
+                    <a:bodyPr/>
+                    <a:lstStyle/>
+                    <a:p>
+                      <a:pPr>
+                        <a:defRPr sz="1000" b="0"/>
+                      </a:pPr>
+                      <a:r>
+                        <a:t>PUR</a:t>
+                      </a:r>
+                    </a:p>
+                  </a:txBody>
+                  <a:tcPr/>
+                </a:tc>
+                <a:tc>
+                  <a:txBody>
+                    <a:bodyPr/>
+                    <a:lstStyle/>
+                    <a:p>
+                      <a:pPr>
+                        <a:defRPr sz="1000" b="0"/>
+                      </a:pPr>
+                      <a:r>
+                        <a:t>PUR Nachtrag 5</a:t>
+                      </a:r>
+                    </a:p>
+                  </a:txBody>
+                  <a:tcPr/>
+                </a:tc>
+                <a:tc>
+                  <a:txBody>
+                    <a:bodyPr/>
+                    <a:lstStyle/>
+                    <a:p>
+                      <a:pPr>
+                        <a:defRPr sz="1000" b="0"/>
+                      </a:pPr>
+                      <a:r>
+                        <a:t>2022-04-18</a:t>
+                      </a:r>
+                    </a:p>
+                  </a:txBody>
+                  <a:tcPr/>
+                </a:tc>
+                <a:tc>
+                  <a:txBody>
+                    <a:bodyPr/>
+                    <a:lstStyle/>
+                    <a:p>
+                      <a:pPr>
+                        <a:defRPr sz="1000" b="0"/>
+                      </a:pPr>
+                      <a:r>
+                        <a:t>1628 d</a:t>
+                      </a:r>
+                    </a:p>
+                  </a:txBody>
+                  <a:tcPr/>
+                </a:tc>
+                <a:tc>
+                  <a:txBody>
+                    <a:bodyPr/>
+                    <a:lstStyle/>
+                    <a:p>
+                      <a:pPr>
+                        <a:defRPr sz="1000" b="0"/>
+                      </a:pPr>
+                      <a:r>
+                        <a:t>50 %</a:t>
+                      </a:r>
+                    </a:p>
+                  </a:txBody>
+                  <a:tcPr/>
+                </a:tc>
+              </a:tr>
+              <a:tr h="365760">
+                <a:tc>
+                  <a:txBody>
+                    <a:bodyPr/>
+                    <a:lstStyle/>
+                    <a:p>
+                      <a:pPr>
+                        <a:defRPr sz="1000" b="0"/>
+                      </a:pPr>
+                      <a:r>
+                        <a:t>SW</a:t>
+                      </a:r>
+                    </a:p>
+                  </a:txBody>
+                  <a:tcPr/>
+                </a:tc>
+                <a:tc>
+                  <a:txBody>
+                    <a:bodyPr/>
+                    <a:lstStyle/>
+                    <a:p>
+                      <a:pPr>
+                        <a:defRPr sz="1000" b="0"/>
+                      </a:pPr>
+                      <a:r>
+                        <a:t>SW Aufgabe 026</a:t>
+                      </a:r>
+                    </a:p>
+                  </a:txBody>
+                  <a:tcPr/>
+                </a:tc>
+                <a:tc>
+                  <a:txBody>
+                    <a:bodyPr/>
+                    <a:lstStyle/>
+                    <a:p>
+                      <a:pPr>
+                        <a:defRPr sz="1000" b="0"/>
+                      </a:pPr>
+                      <a:r>
+                        <a:t>2022-04-18</a:t>
+                      </a:r>
+                    </a:p>
+                  </a:txBody>
+                  <a:tcPr/>
+                </a:tc>
+                <a:tc>
+                  <a:txBody>
+                    <a:bodyPr/>
+                    <a:lstStyle/>
+                    <a:p>
+                      <a:pPr>
+                        <a:defRPr sz="1000" b="0"/>
+                      </a:pPr>
+                      <a:r>
+                        <a:t>1628 d</a:t>
+                      </a:r>
+                    </a:p>
+                  </a:txBody>
+                  <a:tcPr/>
+                </a:tc>
+                <a:tc>
+                  <a:txBody>
+                    <a:bodyPr/>
+                    <a:lstStyle/>
+                    <a:p>
+                      <a:pPr>
+                        <a:defRPr sz="1000" b="0"/>
+                      </a:pPr>
+                      <a:r>
+                        <a:t>73 %</a:t>
+                      </a:r>
+                    </a:p>
+                  </a:txBody>
+                  <a:tcPr/>
+                </a:tc>
+              </a:tr>
+              <a:tr h="365760">
+                <a:tc>
+                  <a:txBody>
+                    <a:bodyPr/>
+                    <a:lstStyle/>
+                    <a:p>
+                      <a:pPr>
+                        <a:defRPr sz="1000" b="0"/>
+                      </a:pPr>
+                      <a:r>
+                        <a:t>AE-QMM</a:t>
+                      </a:r>
+                    </a:p>
+                  </a:txBody>
+                  <a:tcPr/>
+                </a:tc>
+                <a:tc>
+                  <a:txBody>
+                    <a:bodyPr/>
+                    <a:lstStyle/>
+                    <a:p>
+                      <a:pPr>
+                        <a:defRPr sz="1000" b="0"/>
+                      </a:pPr>
+                      <a:r>
+                        <a:t>AE-QMM Aufgabe 028</a:t>
+                      </a:r>
+                    </a:p>
+                  </a:txBody>
+                  <a:tcPr/>
+                </a:tc>
+                <a:tc>
+                  <a:txBody>
+                    <a:bodyPr/>
+                    <a:lstStyle/>
+                    <a:p>
+                      <a:pPr>
+                        <a:defRPr sz="1000" b="0"/>
+                      </a:pPr>
+                      <a:r>
+                        <a:t>2022-04-19</a:t>
+                      </a:r>
+                    </a:p>
+                  </a:txBody>
+                  <a:tcPr/>
+                </a:tc>
+                <a:tc>
+                  <a:txBody>
+                    <a:bodyPr/>
+                    <a:lstStyle/>
+                    <a:p>
+                      <a:pPr>
+                        <a:defRPr sz="1000" b="0"/>
+                      </a:pPr>
+                      <a:r>
+                        <a:t>1627 d</a:t>
+                      </a:r>
+                    </a:p>
+                  </a:txBody>
+                  <a:tcPr/>
+                </a:tc>
+                <a:tc>
+                  <a:txBody>
+                    <a:bodyPr/>
+                    <a:lstStyle/>
+                    <a:p>
+                      <a:pPr>
+                        <a:defRPr sz="1000" b="0"/>
+                      </a:pPr>
+                      <a:r>
+                        <a:t>56 %</a:t>
+                      </a:r>
+                    </a:p>
+                  </a:txBody>
+                  <a:tcPr/>
+                </a:tc>
+              </a:tr>
+              <a:tr h="365760">
+                <a:tc>
+                  <a:txBody>
+                    <a:bodyPr/>
+                    <a:lstStyle/>
+                    <a:p>
+                      <a:pPr>
+                        <a:defRPr sz="1000" b="0"/>
+                      </a:pPr>
+                      <a:r>
+                        <a:t>TEST</a:t>
+                      </a:r>
+                    </a:p>
+                  </a:txBody>
+                  <a:tcPr/>
+                </a:tc>
+                <a:tc>
+                  <a:txBody>
+                    <a:bodyPr/>
+                    <a:lstStyle/>
+                    <a:p>
+                      <a:pPr>
+                        <a:defRPr sz="1000" b="0"/>
+                      </a:pPr>
+                      <a:r>
+                        <a:t>TEST Aufgabe 052</a:t>
+                      </a:r>
+                    </a:p>
+                  </a:txBody>
+                  <a:tcPr/>
+                </a:tc>
+                <a:tc>
+                  <a:txBody>
+                    <a:bodyPr/>
+                    <a:lstStyle/>
+                    <a:p>
+                      <a:pPr>
+                        <a:defRPr sz="1000" b="0"/>
+                      </a:pPr>
+                      <a:r>
+                        <a:t>2022-04-20</a:t>
+                      </a:r>
+                    </a:p>
+                  </a:txBody>
+                  <a:tcPr/>
+                </a:tc>
+                <a:tc>
+                  <a:txBody>
+                    <a:bodyPr/>
+                    <a:lstStyle/>
+                    <a:p>
+                      <a:pPr>
+                        <a:defRPr sz="1000" b="0"/>
+                      </a:pPr>
+                      <a:r>
+                        <a:t>1626 d</a:t>
+                      </a:r>
+                    </a:p>
+                  </a:txBody>
+                  <a:tcPr/>
+                </a:tc>
+                <a:tc>
+                  <a:txBody>
+                    <a:bodyPr/>
+                    <a:lstStyle/>
+                    <a:p>
+                      <a:pPr>
+                        <a:defRPr sz="1000" b="0"/>
+                      </a:pPr>
+                      <a:r>
+                        <a:t>55 %</a:t>
+                      </a:r>
+                    </a:p>
+                  </a:txBody>
+                  <a:tcPr/>
+                </a:tc>
+              </a:tr>
+              <a:tr h="365760">
+                <a:tc>
+                  <a:txBody>
+                    <a:bodyPr/>
+                    <a:lstStyle/>
+                    <a:p>
+                      <a:pPr>
+                        <a:defRPr sz="1000" b="0"/>
+                      </a:pPr>
+                      <a:r>
+                        <a:t>AE-COS</a:t>
+                      </a:r>
+                    </a:p>
+                  </a:txBody>
+                  <a:tcPr/>
+                </a:tc>
+                <a:tc>
+                  <a:txBody>
+                    <a:bodyPr/>
+                    <a:lstStyle/>
+                    <a:p>
+                      <a:pPr>
+                        <a:defRPr sz="1000" b="0"/>
+                      </a:pPr>
+                      <a:r>
+                        <a:t>AE-COS Nachtrag 1</a:t>
+                      </a:r>
+                    </a:p>
+                  </a:txBody>
+                  <a:tcPr/>
+                </a:tc>
+                <a:tc>
+                  <a:txBody>
+                    <a:bodyPr/>
+                    <a:lstStyle/>
+                    <a:p>
+                      <a:pPr>
+                        <a:defRPr sz="1000" b="0"/>
+                      </a:pPr>
+                      <a:r>
+                        <a:t>2022-04-21</a:t>
+                      </a:r>
+                    </a:p>
+                  </a:txBody>
+                  <a:tcPr/>
+                </a:tc>
+                <a:tc>
+                  <a:txBody>
+                    <a:bodyPr/>
+                    <a:lstStyle/>
+                    <a:p>
+                      <a:pPr>
+                        <a:defRPr sz="1000" b="0"/>
+                      </a:pPr>
+                      <a:r>
+                        <a:t>1625 d</a:t>
+                      </a:r>
+                    </a:p>
+                  </a:txBody>
+                  <a:tcPr/>
+                </a:tc>
+                <a:tc>
+                  <a:txBody>
+                    <a:bodyPr/>
+                    <a:lstStyle/>
+                    <a:p>
+                      <a:pPr>
+                        <a:defRPr sz="1000" b="0"/>
+                      </a:pPr>
+                      <a:r>
+                        <a:t>33 %</a:t>
+                      </a:r>
+                    </a:p>
+                  </a:txBody>
+                  <a:tcPr/>
+                </a:tc>
+              </a:tr>
+            </a:tbl>
+          </a:graphicData>
+        </a:graphic>
+      </p:graphicFrame>
+      <p:sp>
+        <p:nvSpPr>
+          <p:cNvPr id="5" name="TextBox 4"/>
+          <p:cNvSpPr txBox="1"/>
+          <p:nvPr/>
+        </p:nvSpPr>
+        <p:spPr>
+          <a:xfrm>
+            <a:off x="365760" y="6446520"/>
+            <a:ext cx="9144000" cy="320040"/>
+          </a:xfrm>
+          <a:prstGeom prst="rect">
+            <a:avLst/>
+          </a:prstGeom>
+          <a:noFill/>
+        </p:spPr>
+        <p:txBody>
+          <a:bodyPr wrap="square">
+            <a:spAutoFit/>
+          </a:bodyPr>
+          <a:lstStyle/>
+          <a:p>
+            <a:pPr>
+              <a:defRPr sz="900" b="0">
+                <a:solidFill>
+                  <a:srgbClr val="888888"/>
+                </a:solidFill>
+              </a:defRPr>
+            </a:pPr>
+            <a:r>
+              <a:t>J.A. Project Engineering · PJM Project Review · Stand 2026-10-02</a:t>
+            </a:r>
+          </a:p>
+        </p:txBody>
+      </p:sp>
+    </p:spTree>
+  </p:cSld>
+  <p:clrMapOvr>
+    <a:masterClrMapping/>
+  </p:clrMapOvr>
+</p:sld>
+</file>
+
+<file path=ppt/slides/slide9.xml><?xml version="1.0" encoding="utf-8"?>
+<p:sld xmlns:a="http://schemas.openxmlformats.org/drawingml/2006/main" xmlns:p="http://schemas.openxmlformats.org/presentationml/2006/main" xmlns:r="http://schemas.openxmlformats.org/officeDocument/2006/relationships">
+  <p:cSld>
+    <p:spTree>
+      <p:nvGrpSpPr>
+        <p:cNvPr id="1" name=""/>
+        <p:cNvGrpSpPr/>
+        <p:nvPr/>
+      </p:nvGrpSpPr>
+      <p:grpSpPr/>
+      <p:sp>
+        <p:nvSpPr>
+          <p:cNvPr id="2" name="TextBox 1"/>
+          <p:cNvSpPr txBox="1"/>
+          <p:nvPr/>
+        </p:nvSpPr>
+        <p:spPr>
+          <a:xfrm>
+            <a:off x="457200" y="320040"/>
+            <a:ext cx="11247120" cy="731520"/>
+          </a:xfrm>
+          <a:prstGeom prst="rect">
+            <a:avLst/>
+          </a:prstGeom>
+          <a:noFill/>
+        </p:spPr>
+        <p:txBody>
+          <a:bodyPr wrap="square">
+            <a:spAutoFit/>
+          </a:bodyPr>
+          <a:lstStyle/>
+          <a:p>
+            <a:pPr>
+              <a:defRPr sz="2600" b="1">
+                <a:solidFill>
+                  <a:srgbClr val="222222"/>
+                </a:solidFill>
+              </a:defRPr>
+            </a:pPr>
+            <a:r>
+              <a:t>Veränderungen 2022-04-08 → 2026-10-02</a:t>
+            </a:r>
+          </a:p>
+        </p:txBody>
+      </p:sp>
+      <p:sp>
+        <p:nvSpPr>
+          <p:cNvPr id="3" name="Rectangle 2"/>
+          <p:cNvSpPr/>
+          <p:nvPr/>
+        </p:nvSpPr>
+        <p:spPr>
+          <a:xfrm>
+            <a:off x="457200" y="1005840"/>
+            <a:ext cx="11247120" cy="19050"/>
+          </a:xfrm>
+          <a:prstGeom prst="rect">
+            <a:avLst/>
+          </a:prstGeom>
+          <a:solidFill>
+            <a:srgbClr val="1F77B4"/>
+          </a:solidFill>
+          <a:ln>
+            <a:noFill/>
+          </a:ln>
+        </p:spPr>
+        <p:style>
+          <a:lnRef idx="1">
+            <a:schemeClr val="accent1"/>
+          </a:lnRef>
+          <a:fillRef idx="3">
+            <a:schemeClr val="accent1"/>
+          </a:fillRef>
+          <a:effectRef idx="2">
+            <a:schemeClr val="accent1"/>
+          </a:effectRef>
+          <a:fontRef idx="minor">
+            <a:schemeClr val="lt1"/>
+          </a:fontRef>
+        </p:style>
+        <p:txBody>
+          <a:bodyPr rtlCol="0" anchor="ctr"/>
+          <a:lstStyle/>
+          <a:p>
+            <a:pPr algn="ctr"/>
+          </a:p>
+        </p:txBody>
+      </p:sp>
       <p:sp>
         <p:nvSpPr>
           <p:cNvPr id="4" name="TextBox 3"/>
@@ -5675,7 +6614,7 @@
               </a:defRPr>
             </a:pPr>
             <a:r>
-              <a:t>Neu überfällig: 7</a:t>
+              <a:t>Neu überfällig: 44</a:t>
             </a:r>
           </a:p>
           <a:p>
@@ -5687,7 +6626,7 @@
               </a:defRPr>
             </a:pPr>
             <a:r>
-              <a:t>   • ENG-EE – ENG-EE Aufgabe 012</a:t>
+              <a:t>   • ENG-ME – ENG-ME Aufgabe 010</a:t>
             </a:r>
           </a:p>
           <a:p>
@@ -5699,7 +6638,7 @@
               </a:defRPr>
             </a:pPr>
             <a:r>
-              <a:t>   • QMM – QMM Aufgabe 015</a:t>
+              <a:t>   • ENG-EE – ENG-EE Aufgabe 012</a:t>
             </a:r>
           </a:p>
           <a:p>
@@ -5711,7 +6650,7 @@
               </a:defRPr>
             </a:pPr>
             <a:r>
-              <a:t>   • TEST – TEST Aufgabe 024</a:t>
+              <a:t>   • QMM – QMM Aufgabe 015</a:t>
             </a:r>
           </a:p>
           <a:p>
@@ -5723,7 +6662,7 @@
               </a:defRPr>
             </a:pPr>
             <a:r>
-              <a:t>   • ENG – ENG Aufgabe 063</a:t>
+              <a:t>   • PUR – PUR Aufgabe 016</a:t>
             </a:r>
           </a:p>
           <a:p>
@@ -5735,7 +6674,7 @@
               </a:defRPr>
             </a:pPr>
             <a:r>
-              <a:t>   • AA – AA Aufgabe 075</a:t>
+              <a:t>   • AE-ENG – AE-ENG Aufgabe 017</a:t>
             </a:r>
           </a:p>
           <a:p>
@@ -5747,7 +6686,7 @@
               </a:defRPr>
             </a:pPr>
             <a:r>
-              <a:t>   • TEST – TEST Aufgabe 078</a:t>
+              <a:t>   • ENG-ME – ENG-ME Aufgabe 019</a:t>
             </a:r>
           </a:p>
           <a:p>
@@ -5759,7 +6698,19 @@
               </a:defRPr>
             </a:pPr>
             <a:r>
-              <a:t>   • AE-COS – AE-COS Aufgabe 082</a:t>
+              <a:t>   • QMM – QMM Aufgabe 020</a:t>
+            </a:r>
+          </a:p>
+          <a:p>
+            <a:pPr>
+              <a:defRPr sz="1200" b="0">
+                <a:solidFill>
+                  <a:srgbClr val="222222"/>
+                </a:solidFill>
+              </a:defRPr>
+            </a:pPr>
+            <a:r>
+              <a:t>   • AE-TEF – AE-TEF Aufgabe 023</a:t>
             </a:r>
           </a:p>
           <a:p>
@@ -5914,7 +6865,7 @@
               </a:defRPr>
             </a:pPr>
             <a:r>
-              <a:t>J.A. Project Engineering · PJM Project Review · Stand 2022-04-15</a:t>
+              <a:t>J.A. Project Engineering · PJM Project Review · Stand 2026-10-02</a:t>
             </a:r>
           </a:p>
         </p:txBody>
